--- a/pitch/oma-pitch-template.pptx
+++ b/pitch/oma-pitch-template.pptx
@@ -3342,7 +3342,7 @@
                 </a:solidFill>
                 <a:latin typeface="IBM Plex Sans"/>
               </a:rPr>
-              <a:t>Prepared for [Client]  ·  July 2026</a:t>
+              <a:t>Prepared for [Client]  ·  August 2026</a:t>
             </a:r>
           </a:p>
         </p:txBody>
@@ -5556,7 +5556,7 @@
     </a:clrScheme>
     <a:fontScheme name="Office">
       <a:majorFont>
-        <a:latin typeface="Calibri"/>
+        <a:latin typeface="Instrument Serif"/>
         <a:ea typeface=""/>
         <a:cs typeface=""/>
         <a:font script="Jpan" typeface="ＭＳ Ｐゴシック"/>
@@ -5591,7 +5591,7 @@
         <a:font script="Geor" typeface="Sylfaen"/>
       </a:majorFont>
       <a:minorFont>
-        <a:latin typeface="Calibri"/>
+        <a:latin typeface="IBM Plex Sans"/>
         <a:ea typeface=""/>
         <a:cs typeface=""/>
         <a:font script="Jpan" typeface="ＭＳ Ｐゴシック"/>

--- a/pitch/oma-pitch-template.pptx
+++ b/pitch/oma-pitch-template.pptx
@@ -17,6 +17,24 @@
   </p:sldIdLst>
   <p:sldSz cx="12191695" cy="6858000" type="screen4x3"/>
   <p:notesSz cx="6858000" cy="9144000"/>
+  <p:embeddedFontLst>
+    <p:embeddedFont>
+      <p:font typeface="Instrument Serif" charset="0"/>
+      <p:regular r:id="rId16"/>
+      <p:italic r:id="rId17"/>
+    </p:embeddedFont>
+    <p:embeddedFont>
+      <p:font typeface="IBM Plex Sans" charset="0"/>
+      <p:regular r:id="rId18"/>
+      <p:bold r:id="rId19"/>
+      <p:italic r:id="rId20"/>
+      <p:boldItalic r:id="rId21"/>
+    </p:embeddedFont>
+    <p:embeddedFont>
+      <p:font typeface="IBM Plex Mono" charset="0"/>
+      <p:regular r:id="rId22"/>
+    </p:embeddedFont>
+  </p:embeddedFontLst>
   <p:defaultTextStyle>
     <a:defPPr>
       <a:defRPr lang="en-US"/>

--- a/pitch/oma-pitch-template.pptx
+++ b/pitch/oma-pitch-template.pptx
@@ -3114,12 +3114,20 @@
         <p:nvPr/>
       </p:nvGrpSpPr>
       <p:grpSpPr/>
-      <p:sp>
-        <p:nvSpPr>
-          <p:cNvPr id="2" name="Rectangle 1"/>
-          <p:cNvSpPr/>
+      <p:pic>
+        <p:nvPicPr>
+          <p:cNvPr id="2" name="Picture 1" descr="hero-streamlines.png"/>
+          <p:cNvPicPr>
+            <a:picLocks noChangeAspect="1"/>
+          </p:cNvPicPr>
           <p:nvPr/>
-        </p:nvSpPr>
+        </p:nvPicPr>
+        <p:blipFill>
+          <a:blip r:embed="rId2"/>
+          <a:stretch>
+            <a:fillRect/>
+          </a:stretch>
+        </p:blipFill>
         <p:spPr>
           <a:xfrm>
             <a:off x="0" y="0"/>
@@ -3128,22 +3136,8 @@
           <a:prstGeom prst="rect">
             <a:avLst/>
           </a:prstGeom>
-          <a:solidFill>
-            <a:srgbClr val="050F1C"/>
-          </a:solidFill>
-          <a:ln>
-            <a:noFill/>
-          </a:ln>
-          <a:effectLst/>
-        </p:spPr>
-        <p:txBody>
-          <a:bodyPr rtlCol="0" anchor="ctr"/>
-          <a:lstStyle/>
-          <a:p>
-            <a:pPr algn="ctr"/>
-          </a:p>
-        </p:txBody>
-      </p:sp>
+        </p:spPr>
+      </p:pic>
       <p:sp>
         <p:nvSpPr>
           <p:cNvPr id="3" name="Rectangle 2"/>
@@ -3183,7 +3177,7 @@
           <p:nvPr/>
         </p:nvPicPr>
         <p:blipFill>
-          <a:blip r:embed="rId2"/>
+          <a:blip r:embed="rId3"/>
           <a:stretch>
             <a:fillRect/>
           </a:stretch>

--- a/pitch/oma-pitch-template.pptx
+++ b/pitch/oma-pitch-template.pptx
@@ -3221,7 +3221,115 @@
                 </a:solidFill>
                 <a:latin typeface="Instrument Serif"/>
               </a:rPr>
-              <a:t>Ocean Motion </a:t>
+              <a:t>O</a:t>
+            </a:r>
+            <a:r>
+              <a:rPr sz="2200" b="0" i="0">
+                <a:solidFill>
+                  <a:srgbClr val="EDEEE4"/>
+                </a:solidFill>
+                <a:latin typeface="Instrument Serif"/>
+              </a:rPr>
+              <a:t>c</a:t>
+            </a:r>
+            <a:r>
+              <a:rPr sz="2200" b="0" i="0">
+                <a:solidFill>
+                  <a:srgbClr val="E6ECE4"/>
+                </a:solidFill>
+                <a:latin typeface="Instrument Serif"/>
+              </a:rPr>
+              <a:t>e</a:t>
+            </a:r>
+            <a:r>
+              <a:rPr sz="2200" b="0" i="0">
+                <a:solidFill>
+                  <a:srgbClr val="DFEBE5"/>
+                </a:solidFill>
+                <a:latin typeface="Instrument Serif"/>
+              </a:rPr>
+              <a:t>a</a:t>
+            </a:r>
+            <a:r>
+              <a:rPr sz="2200" b="0" i="0">
+                <a:solidFill>
+                  <a:srgbClr val="D8EAE6"/>
+                </a:solidFill>
+                <a:latin typeface="Instrument Serif"/>
+              </a:rPr>
+              <a:t>n</a:t>
+            </a:r>
+            <a:r>
+              <a:rPr sz="2200" b="0" i="0">
+                <a:solidFill>
+                  <a:srgbClr val="D1E8E6"/>
+                </a:solidFill>
+                <a:latin typeface="Instrument Serif"/>
+              </a:rPr>
+              <a:t> </a:t>
+            </a:r>
+            <a:r>
+              <a:rPr sz="2200" b="0" i="0">
+                <a:solidFill>
+                  <a:srgbClr val="CBE7E7"/>
+                </a:solidFill>
+                <a:latin typeface="Instrument Serif"/>
+              </a:rPr>
+              <a:t>M</a:t>
+            </a:r>
+            <a:r>
+              <a:rPr sz="2200" b="0" i="0">
+                <a:solidFill>
+                  <a:srgbClr val="C4E5E7"/>
+                </a:solidFill>
+                <a:latin typeface="Instrument Serif"/>
+              </a:rPr>
+              <a:t>o</a:t>
+            </a:r>
+            <a:r>
+              <a:rPr sz="2200" b="0" i="0">
+                <a:solidFill>
+                  <a:srgbClr val="BDE4E8"/>
+                </a:solidFill>
+                <a:latin typeface="Instrument Serif"/>
+              </a:rPr>
+              <a:t>t</a:t>
+            </a:r>
+            <a:r>
+              <a:rPr sz="2200" b="0" i="0">
+                <a:solidFill>
+                  <a:srgbClr val="B6E3E9"/>
+                </a:solidFill>
+                <a:latin typeface="Instrument Serif"/>
+              </a:rPr>
+              <a:t>i</a:t>
+            </a:r>
+            <a:r>
+              <a:rPr sz="2200" b="0" i="0">
+                <a:solidFill>
+                  <a:srgbClr val="AFE1E9"/>
+                </a:solidFill>
+                <a:latin typeface="Instrument Serif"/>
+              </a:rPr>
+              <a:t>o</a:t>
+            </a:r>
+            <a:r>
+              <a:rPr sz="2200" b="0" i="0">
+                <a:solidFill>
+                  <a:srgbClr val="A8E0EA"/>
+                </a:solidFill>
+                <a:latin typeface="Instrument Serif"/>
+              </a:rPr>
+              <a:t>n</a:t>
+            </a:r>
+            <a:r>
+              <a:rPr sz="2200" b="0" i="0">
+                <a:solidFill>
+                  <a:srgbClr val="A8E0EA"/>
+                </a:solidFill>
+                <a:latin typeface="Instrument Serif"/>
+              </a:rPr>
+              <a:t> </a:t>
             </a:r>
             <a:r>
               <a:rPr sz="1000" b="0" i="0" spc="220">
@@ -5349,7 +5457,115 @@
                 </a:solidFill>
                 <a:latin typeface="Instrument Serif"/>
               </a:rPr>
-              <a:t>Ocean Motion </a:t>
+              <a:t>O</a:t>
+            </a:r>
+            <a:r>
+              <a:rPr sz="2200" b="0" i="0">
+                <a:solidFill>
+                  <a:srgbClr val="EDEEE4"/>
+                </a:solidFill>
+                <a:latin typeface="Instrument Serif"/>
+              </a:rPr>
+              <a:t>c</a:t>
+            </a:r>
+            <a:r>
+              <a:rPr sz="2200" b="0" i="0">
+                <a:solidFill>
+                  <a:srgbClr val="E6ECE4"/>
+                </a:solidFill>
+                <a:latin typeface="Instrument Serif"/>
+              </a:rPr>
+              <a:t>e</a:t>
+            </a:r>
+            <a:r>
+              <a:rPr sz="2200" b="0" i="0">
+                <a:solidFill>
+                  <a:srgbClr val="DFEBE5"/>
+                </a:solidFill>
+                <a:latin typeface="Instrument Serif"/>
+              </a:rPr>
+              <a:t>a</a:t>
+            </a:r>
+            <a:r>
+              <a:rPr sz="2200" b="0" i="0">
+                <a:solidFill>
+                  <a:srgbClr val="D8EAE6"/>
+                </a:solidFill>
+                <a:latin typeface="Instrument Serif"/>
+              </a:rPr>
+              <a:t>n</a:t>
+            </a:r>
+            <a:r>
+              <a:rPr sz="2200" b="0" i="0">
+                <a:solidFill>
+                  <a:srgbClr val="D1E8E6"/>
+                </a:solidFill>
+                <a:latin typeface="Instrument Serif"/>
+              </a:rPr>
+              <a:t> </a:t>
+            </a:r>
+            <a:r>
+              <a:rPr sz="2200" b="0" i="0">
+                <a:solidFill>
+                  <a:srgbClr val="CBE7E7"/>
+                </a:solidFill>
+                <a:latin typeface="Instrument Serif"/>
+              </a:rPr>
+              <a:t>M</a:t>
+            </a:r>
+            <a:r>
+              <a:rPr sz="2200" b="0" i="0">
+                <a:solidFill>
+                  <a:srgbClr val="C4E5E7"/>
+                </a:solidFill>
+                <a:latin typeface="Instrument Serif"/>
+              </a:rPr>
+              <a:t>o</a:t>
+            </a:r>
+            <a:r>
+              <a:rPr sz="2200" b="0" i="0">
+                <a:solidFill>
+                  <a:srgbClr val="BDE4E8"/>
+                </a:solidFill>
+                <a:latin typeface="Instrument Serif"/>
+              </a:rPr>
+              <a:t>t</a:t>
+            </a:r>
+            <a:r>
+              <a:rPr sz="2200" b="0" i="0">
+                <a:solidFill>
+                  <a:srgbClr val="B6E3E9"/>
+                </a:solidFill>
+                <a:latin typeface="Instrument Serif"/>
+              </a:rPr>
+              <a:t>i</a:t>
+            </a:r>
+            <a:r>
+              <a:rPr sz="2200" b="0" i="0">
+                <a:solidFill>
+                  <a:srgbClr val="AFE1E9"/>
+                </a:solidFill>
+                <a:latin typeface="Instrument Serif"/>
+              </a:rPr>
+              <a:t>o</a:t>
+            </a:r>
+            <a:r>
+              <a:rPr sz="2200" b="0" i="0">
+                <a:solidFill>
+                  <a:srgbClr val="A8E0EA"/>
+                </a:solidFill>
+                <a:latin typeface="Instrument Serif"/>
+              </a:rPr>
+              <a:t>n</a:t>
+            </a:r>
+            <a:r>
+              <a:rPr sz="2200" b="0" i="0">
+                <a:solidFill>
+                  <a:srgbClr val="A8E0EA"/>
+                </a:solidFill>
+                <a:latin typeface="Instrument Serif"/>
+              </a:rPr>
+              <a:t> </a:t>
             </a:r>
             <a:r>
               <a:rPr sz="1000" b="0" i="0" spc="220">

--- a/pitch/oma-pitch-template.pptx
+++ b/pitch/oma-pitch-template.pptx
@@ -3116,7 +3116,7 @@
       <p:grpSpPr/>
       <p:pic>
         <p:nvPicPr>
-          <p:cNvPr id="2" name="Picture 1" descr="hero-streamlines.png"/>
+          <p:cNvPr id="2" name="Picture 1" descr="hero-streamlines.gif"/>
           <p:cNvPicPr>
             <a:picLocks noChangeAspect="1"/>
           </p:cNvPicPr>

--- a/pitch/oma-pitch-template.pptx
+++ b/pitch/oma-pitch-template.pptx
@@ -6,33 +6,34 @@
   </p:sldMasterIdLst>
   <p:sldIdLst>
     <p:sldId id="256" r:id="rId7"/>
-    <p:sldId id="257" r:id="rId8"/>
-    <p:sldId id="258" r:id="rId9"/>
-    <p:sldId id="259" r:id="rId10"/>
-    <p:sldId id="260" r:id="rId11"/>
-    <p:sldId id="261" r:id="rId12"/>
-    <p:sldId id="262" r:id="rId13"/>
-    <p:sldId id="263" r:id="rId14"/>
-    <p:sldId id="264" r:id="rId15"/>
+    <p:sldId id="257" r:id="rId9"/>
+    <p:sldId id="258" r:id="rId10"/>
+    <p:sldId id="259" r:id="rId11"/>
+    <p:sldId id="260" r:id="rId12"/>
+    <p:sldId id="261" r:id="rId13"/>
+    <p:sldId id="262" r:id="rId14"/>
+    <p:sldId id="263" r:id="rId15"/>
+    <p:sldId id="264" r:id="rId16"/>
+    <p:sldId id="265" r:id="rId17"/>
   </p:sldIdLst>
   <p:sldSz cx="12191695" cy="6858000" type="screen4x3"/>
   <p:notesSz cx="6858000" cy="9144000"/>
   <p:embeddedFontLst>
     <p:embeddedFont>
       <p:font typeface="Instrument Serif" charset="0"/>
-      <p:regular r:id="rId16"/>
-      <p:italic r:id="rId17"/>
+      <p:regular r:id="rId18"/>
+      <p:italic r:id="rId19"/>
     </p:embeddedFont>
     <p:embeddedFont>
       <p:font typeface="IBM Plex Sans" charset="0"/>
-      <p:regular r:id="rId18"/>
-      <p:bold r:id="rId19"/>
-      <p:italic r:id="rId20"/>
-      <p:boldItalic r:id="rId21"/>
+      <p:regular r:id="rId20"/>
+      <p:bold r:id="rId21"/>
+      <p:italic r:id="rId22"/>
+      <p:boldItalic r:id="rId23"/>
     </p:embeddedFont>
     <p:embeddedFont>
       <p:font typeface="IBM Plex Mono" charset="0"/>
-      <p:regular r:id="rId22"/>
+      <p:regular r:id="rId24"/>
     </p:embeddedFont>
   </p:embeddedFontLst>
   <p:defaultTextStyle>
@@ -131,6 +132,496 @@
     </a:lvl9pPr>
   </p:defaultTextStyle>
 </p:presentation>
+</file>
+
+<file path=ppt/notesMasters/notesMaster1.xml><?xml version="1.0" encoding="utf-8"?>
+<p:notesMaster xmlns:a="http://schemas.openxmlformats.org/drawingml/2006/main" xmlns:p="http://schemas.openxmlformats.org/presentationml/2006/main" xmlns:r="http://schemas.openxmlformats.org/officeDocument/2006/relationships">
+  <p:cSld>
+    <p:bg>
+      <p:bgRef idx="1001">
+        <a:schemeClr val="bg1"/>
+      </p:bgRef>
+    </p:bg>
+    <p:spTree>
+      <p:nvGrpSpPr>
+        <p:cNvPr id="1" name=""/>
+        <p:cNvGrpSpPr/>
+        <p:nvPr/>
+      </p:nvGrpSpPr>
+      <p:grpSpPr>
+        <a:xfrm>
+          <a:off x="0" y="0"/>
+          <a:ext cx="0" cy="0"/>
+          <a:chOff x="0" y="0"/>
+          <a:chExt cx="0" cy="0"/>
+        </a:xfrm>
+      </p:grpSpPr>
+      <p:sp>
+        <p:nvSpPr>
+          <p:cNvPr id="2" name="Header Placeholder 1"/>
+          <p:cNvSpPr>
+            <a:spLocks noGrp="1"/>
+          </p:cNvSpPr>
+          <p:nvPr>
+            <p:ph type="hdr" sz="quarter"/>
+          </p:nvPr>
+        </p:nvSpPr>
+        <p:spPr>
+          <a:xfrm>
+            <a:off x="0" y="0"/>
+            <a:ext cx="2971800" cy="457200"/>
+          </a:xfrm>
+          <a:prstGeom prst="rect">
+            <a:avLst/>
+          </a:prstGeom>
+        </p:spPr>
+        <p:txBody>
+          <a:bodyPr vert="horz" lIns="91440" tIns="45720" rIns="91440" bIns="45720" rtlCol="0"/>
+          <a:lstStyle>
+            <a:lvl1pPr algn="l">
+              <a:defRPr sz="1200"/>
+            </a:lvl1pPr>
+          </a:lstStyle>
+          <a:p>
+            <a:endParaRPr lang="en-US"/>
+          </a:p>
+        </p:txBody>
+      </p:sp>
+      <p:sp>
+        <p:nvSpPr>
+          <p:cNvPr id="3" name="Date Placeholder 2"/>
+          <p:cNvSpPr>
+            <a:spLocks noGrp="1"/>
+          </p:cNvSpPr>
+          <p:nvPr>
+            <p:ph type="dt" idx="1"/>
+          </p:nvPr>
+        </p:nvSpPr>
+        <p:spPr>
+          <a:xfrm>
+            <a:off x="3884613" y="0"/>
+            <a:ext cx="2971800" cy="457200"/>
+          </a:xfrm>
+          <a:prstGeom prst="rect">
+            <a:avLst/>
+          </a:prstGeom>
+        </p:spPr>
+        <p:txBody>
+          <a:bodyPr vert="horz" lIns="91440" tIns="45720" rIns="91440" bIns="45720" rtlCol="0"/>
+          <a:lstStyle>
+            <a:lvl1pPr algn="r">
+              <a:defRPr sz="1200"/>
+            </a:lvl1pPr>
+          </a:lstStyle>
+          <a:p>
+            <a:fld id="{0F89C1C7-3DCD-1040-A9CF-14679D8B5DDD}" type="datetimeFigureOut">
+              <a:rPr lang="en-US" smtClean="0"/>
+              <a:t>10/17/16</a:t>
+            </a:fld>
+            <a:endParaRPr lang="en-US"/>
+          </a:p>
+        </p:txBody>
+      </p:sp>
+      <p:sp>
+        <p:nvSpPr>
+          <p:cNvPr id="4" name="Slide Image Placeholder 3"/>
+          <p:cNvSpPr>
+            <a:spLocks noGrp="1" noRot="1" noChangeAspect="1"/>
+          </p:cNvSpPr>
+          <p:nvPr>
+            <p:ph type="sldImg" idx="2"/>
+          </p:nvPr>
+        </p:nvSpPr>
+        <p:spPr>
+          <a:xfrm>
+            <a:off x="1143000" y="685800"/>
+            <a:ext cx="4572000" cy="3429000"/>
+          </a:xfrm>
+          <a:prstGeom prst="rect">
+            <a:avLst/>
+          </a:prstGeom>
+          <a:noFill/>
+          <a:ln w="12700">
+            <a:solidFill>
+              <a:prstClr val="black"/>
+            </a:solidFill>
+          </a:ln>
+        </p:spPr>
+        <p:txBody>
+          <a:bodyPr vert="horz" lIns="91440" tIns="45720" rIns="91440" bIns="45720" rtlCol="0" anchor="ctr"/>
+          <a:lstStyle/>
+          <a:p>
+            <a:endParaRPr lang="en-US"/>
+          </a:p>
+        </p:txBody>
+      </p:sp>
+      <p:sp>
+        <p:nvSpPr>
+          <p:cNvPr id="5" name="Notes Placeholder 4"/>
+          <p:cNvSpPr>
+            <a:spLocks noGrp="1"/>
+          </p:cNvSpPr>
+          <p:nvPr>
+            <p:ph type="body" sz="quarter" idx="3"/>
+          </p:nvPr>
+        </p:nvSpPr>
+        <p:spPr>
+          <a:xfrm>
+            <a:off x="685800" y="4343400"/>
+            <a:ext cx="5486400" cy="4114800"/>
+          </a:xfrm>
+          <a:prstGeom prst="rect">
+            <a:avLst/>
+          </a:prstGeom>
+        </p:spPr>
+        <p:txBody>
+          <a:bodyPr vert="horz" lIns="91440" tIns="45720" rIns="91440" bIns="45720" rtlCol="0"/>
+          <a:lstStyle/>
+          <a:p>
+            <a:pPr lvl="0"/>
+            <a:r>
+              <a:rPr lang="en-US" smtClean="0"/>
+              <a:t>Click to edit Master text styles</a:t>
+            </a:r>
+          </a:p>
+          <a:p>
+            <a:pPr lvl="1"/>
+            <a:r>
+              <a:rPr lang="en-US" smtClean="0"/>
+              <a:t>Second level</a:t>
+            </a:r>
+          </a:p>
+          <a:p>
+            <a:pPr lvl="2"/>
+            <a:r>
+              <a:rPr lang="en-US" smtClean="0"/>
+              <a:t>Third level</a:t>
+            </a:r>
+          </a:p>
+          <a:p>
+            <a:pPr lvl="3"/>
+            <a:r>
+              <a:rPr lang="en-US" smtClean="0"/>
+              <a:t>Fourth level</a:t>
+            </a:r>
+          </a:p>
+          <a:p>
+            <a:pPr lvl="4"/>
+            <a:r>
+              <a:rPr lang="en-US" smtClean="0"/>
+              <a:t>Fifth level</a:t>
+            </a:r>
+            <a:endParaRPr lang="en-US"/>
+          </a:p>
+        </p:txBody>
+      </p:sp>
+      <p:sp>
+        <p:nvSpPr>
+          <p:cNvPr id="6" name="Footer Placeholder 5"/>
+          <p:cNvSpPr>
+            <a:spLocks noGrp="1"/>
+          </p:cNvSpPr>
+          <p:nvPr>
+            <p:ph type="ftr" sz="quarter" idx="4"/>
+          </p:nvPr>
+        </p:nvSpPr>
+        <p:spPr>
+          <a:xfrm>
+            <a:off x="0" y="8685213"/>
+            <a:ext cx="2971800" cy="457200"/>
+          </a:xfrm>
+          <a:prstGeom prst="rect">
+            <a:avLst/>
+          </a:prstGeom>
+        </p:spPr>
+        <p:txBody>
+          <a:bodyPr vert="horz" lIns="91440" tIns="45720" rIns="91440" bIns="45720" rtlCol="0" anchor="b"/>
+          <a:lstStyle>
+            <a:lvl1pPr algn="l">
+              <a:defRPr sz="1200"/>
+            </a:lvl1pPr>
+          </a:lstStyle>
+          <a:p>
+            <a:endParaRPr lang="en-US"/>
+          </a:p>
+        </p:txBody>
+      </p:sp>
+      <p:sp>
+        <p:nvSpPr>
+          <p:cNvPr id="7" name="Slide Number Placeholder 6"/>
+          <p:cNvSpPr>
+            <a:spLocks noGrp="1"/>
+          </p:cNvSpPr>
+          <p:nvPr>
+            <p:ph type="sldNum" sz="quarter" idx="5"/>
+          </p:nvPr>
+        </p:nvSpPr>
+        <p:spPr>
+          <a:xfrm>
+            <a:off x="3884613" y="8685213"/>
+            <a:ext cx="2971800" cy="457200"/>
+          </a:xfrm>
+          <a:prstGeom prst="rect">
+            <a:avLst/>
+          </a:prstGeom>
+        </p:spPr>
+        <p:txBody>
+          <a:bodyPr vert="horz" lIns="91440" tIns="45720" rIns="91440" bIns="45720" rtlCol="0" anchor="b"/>
+          <a:lstStyle>
+            <a:lvl1pPr algn="r">
+              <a:defRPr sz="1200"/>
+            </a:lvl1pPr>
+          </a:lstStyle>
+          <a:p>
+            <a:fld id="{BB5E49A5-4136-284D-997B-48E1D791AD67}" type="slidenum">
+              <a:rPr lang="en-US" smtClean="0"/>
+              <a:t>‹#›</a:t>
+            </a:fld>
+            <a:endParaRPr lang="en-US"/>
+          </a:p>
+        </p:txBody>
+      </p:sp>
+    </p:spTree>
+    <p:extLst>
+      <p:ext uri="{BB962C8B-B14F-4D97-AF65-F5344CB8AC3E}">
+        <p14:creationId xmlns:p14="http://schemas.microsoft.com/office/powerpoint/2010/main" val="2623252185"/>
+      </p:ext>
+    </p:extLst>
+  </p:cSld>
+  <p:clrMap bg1="lt1" tx1="dk1" bg2="lt2" tx2="dk2" accent1="accent1" accent2="accent2" accent3="accent3" accent4="accent4" accent5="accent5" accent6="accent6" hlink="hlink" folHlink="folHlink"/>
+  <p:notesStyle>
+    <a:lvl1pPr marL="0" algn="l" defTabSz="457200" rtl="0" eaLnBrk="1" latinLnBrk="0" hangingPunct="1">
+      <a:defRPr sz="1200" kern="1200">
+        <a:solidFill>
+          <a:schemeClr val="tx1"/>
+        </a:solidFill>
+        <a:latin typeface="+mn-lt"/>
+        <a:ea typeface="+mn-ea"/>
+        <a:cs typeface="+mn-cs"/>
+      </a:defRPr>
+    </a:lvl1pPr>
+    <a:lvl2pPr marL="457200" algn="l" defTabSz="457200" rtl="0" eaLnBrk="1" latinLnBrk="0" hangingPunct="1">
+      <a:defRPr sz="1200" kern="1200">
+        <a:solidFill>
+          <a:schemeClr val="tx1"/>
+        </a:solidFill>
+        <a:latin typeface="+mn-lt"/>
+        <a:ea typeface="+mn-ea"/>
+        <a:cs typeface="+mn-cs"/>
+      </a:defRPr>
+    </a:lvl2pPr>
+    <a:lvl3pPr marL="914400" algn="l" defTabSz="457200" rtl="0" eaLnBrk="1" latinLnBrk="0" hangingPunct="1">
+      <a:defRPr sz="1200" kern="1200">
+        <a:solidFill>
+          <a:schemeClr val="tx1"/>
+        </a:solidFill>
+        <a:latin typeface="+mn-lt"/>
+        <a:ea typeface="+mn-ea"/>
+        <a:cs typeface="+mn-cs"/>
+      </a:defRPr>
+    </a:lvl3pPr>
+    <a:lvl4pPr marL="1371600" algn="l" defTabSz="457200" rtl="0" eaLnBrk="1" latinLnBrk="0" hangingPunct="1">
+      <a:defRPr sz="1200" kern="1200">
+        <a:solidFill>
+          <a:schemeClr val="tx1"/>
+        </a:solidFill>
+        <a:latin typeface="+mn-lt"/>
+        <a:ea typeface="+mn-ea"/>
+        <a:cs typeface="+mn-cs"/>
+      </a:defRPr>
+    </a:lvl4pPr>
+    <a:lvl5pPr marL="1828800" algn="l" defTabSz="457200" rtl="0" eaLnBrk="1" latinLnBrk="0" hangingPunct="1">
+      <a:defRPr sz="1200" kern="1200">
+        <a:solidFill>
+          <a:schemeClr val="tx1"/>
+        </a:solidFill>
+        <a:latin typeface="+mn-lt"/>
+        <a:ea typeface="+mn-ea"/>
+        <a:cs typeface="+mn-cs"/>
+      </a:defRPr>
+    </a:lvl5pPr>
+    <a:lvl6pPr marL="2286000" algn="l" defTabSz="457200" rtl="0" eaLnBrk="1" latinLnBrk="0" hangingPunct="1">
+      <a:defRPr sz="1200" kern="1200">
+        <a:solidFill>
+          <a:schemeClr val="tx1"/>
+        </a:solidFill>
+        <a:latin typeface="+mn-lt"/>
+        <a:ea typeface="+mn-ea"/>
+        <a:cs typeface="+mn-cs"/>
+      </a:defRPr>
+    </a:lvl6pPr>
+    <a:lvl7pPr marL="2743200" algn="l" defTabSz="457200" rtl="0" eaLnBrk="1" latinLnBrk="0" hangingPunct="1">
+      <a:defRPr sz="1200" kern="1200">
+        <a:solidFill>
+          <a:schemeClr val="tx1"/>
+        </a:solidFill>
+        <a:latin typeface="+mn-lt"/>
+        <a:ea typeface="+mn-ea"/>
+        <a:cs typeface="+mn-cs"/>
+      </a:defRPr>
+    </a:lvl7pPr>
+    <a:lvl8pPr marL="3200400" algn="l" defTabSz="457200" rtl="0" eaLnBrk="1" latinLnBrk="0" hangingPunct="1">
+      <a:defRPr sz="1200" kern="1200">
+        <a:solidFill>
+          <a:schemeClr val="tx1"/>
+        </a:solidFill>
+        <a:latin typeface="+mn-lt"/>
+        <a:ea typeface="+mn-ea"/>
+        <a:cs typeface="+mn-cs"/>
+      </a:defRPr>
+    </a:lvl8pPr>
+    <a:lvl9pPr marL="3657600" algn="l" defTabSz="457200" rtl="0" eaLnBrk="1" latinLnBrk="0" hangingPunct="1">
+      <a:defRPr sz="1200" kern="1200">
+        <a:solidFill>
+          <a:schemeClr val="tx1"/>
+        </a:solidFill>
+        <a:latin typeface="+mn-lt"/>
+        <a:ea typeface="+mn-ea"/>
+        <a:cs typeface="+mn-cs"/>
+      </a:defRPr>
+    </a:lvl9pPr>
+  </p:notesStyle>
+</p:notesMaster>
+</file>
+
+<file path=ppt/notesSlides/notesSlide1.xml><?xml version="1.0" encoding="utf-8"?>
+<p:notes xmlns:a="http://schemas.openxmlformats.org/drawingml/2006/main" xmlns:p="http://schemas.openxmlformats.org/presentationml/2006/main" xmlns:r="http://schemas.openxmlformats.org/officeDocument/2006/relationships">
+  <p:cSld>
+    <p:spTree>
+      <p:nvGrpSpPr>
+        <p:cNvPr id="1" name=""/>
+        <p:cNvGrpSpPr/>
+        <p:nvPr/>
+      </p:nvGrpSpPr>
+      <p:grpSpPr>
+        <a:xfrm>
+          <a:off x="0" y="0"/>
+          <a:ext cx="0" cy="0"/>
+          <a:chOff x="0" y="0"/>
+          <a:chExt cx="0" cy="0"/>
+        </a:xfrm>
+      </p:grpSpPr>
+      <p:sp>
+        <p:nvSpPr>
+          <p:cNvPr id="2" name="Slide Image Placeholder 1"/>
+          <p:cNvSpPr>
+            <a:spLocks noGrp="1"/>
+          </p:cNvSpPr>
+          <p:nvPr>
+            <p:ph type="sldImg" idx="2"/>
+          </p:nvPr>
+        </p:nvSpPr>
+        <p:spPr/>
+      </p:sp>
+      <p:sp>
+        <p:nvSpPr>
+          <p:cNvPr id="3" name="Notes Placeholder 2"/>
+          <p:cNvSpPr>
+            <a:spLocks noGrp="1"/>
+          </p:cNvSpPr>
+          <p:nvPr>
+            <p:ph type="body" idx="3" sz="quarter"/>
+          </p:nvPr>
+        </p:nvSpPr>
+        <p:spPr/>
+        <p:txBody>
+          <a:bodyPr/>
+          <a:lstStyle/>
+          <a:p>
+            <a:r>
+              <a:t>TITLE — OPTION A (animated). Background is a seamless 6 s loop of the website's hero flow field, cyan only. Animates in PowerPoint slideshow view and in Google Slides present mode; a PDF export freezes frame 1. Keep either this slide or option B, not both.</a:t>
+            </a:r>
+          </a:p>
+        </p:txBody>
+      </p:sp>
+      <p:sp>
+        <p:nvSpPr>
+          <p:cNvPr id="4" name="Slide Number Placeholder 3"/>
+          <p:cNvSpPr>
+            <a:spLocks noGrp="1"/>
+          </p:cNvSpPr>
+          <p:nvPr>
+            <p:ph type="sldNum" idx="5" sz="quarter"/>
+          </p:nvPr>
+        </p:nvSpPr>
+        <p:spPr/>
+      </p:sp>
+    </p:spTree>
+  </p:cSld>
+  <p:clrMapOvr>
+    <a:masterClrMapping/>
+  </p:clrMapOvr>
+</p:notes>
+</file>
+
+<file path=ppt/notesSlides/notesSlide2.xml><?xml version="1.0" encoding="utf-8"?>
+<p:notes xmlns:a="http://schemas.openxmlformats.org/drawingml/2006/main" xmlns:p="http://schemas.openxmlformats.org/presentationml/2006/main" xmlns:r="http://schemas.openxmlformats.org/officeDocument/2006/relationships">
+  <p:cSld>
+    <p:spTree>
+      <p:nvGrpSpPr>
+        <p:cNvPr id="1" name=""/>
+        <p:cNvGrpSpPr/>
+        <p:nvPr/>
+      </p:nvGrpSpPr>
+      <p:grpSpPr>
+        <a:xfrm>
+          <a:off x="0" y="0"/>
+          <a:ext cx="0" cy="0"/>
+          <a:chOff x="0" y="0"/>
+          <a:chExt cx="0" cy="0"/>
+        </a:xfrm>
+      </p:grpSpPr>
+      <p:sp>
+        <p:nvSpPr>
+          <p:cNvPr id="2" name="Slide Image Placeholder 1"/>
+          <p:cNvSpPr>
+            <a:spLocks noGrp="1"/>
+          </p:cNvSpPr>
+          <p:nvPr>
+            <p:ph type="sldImg" idx="2"/>
+          </p:nvPr>
+        </p:nvSpPr>
+        <p:spPr/>
+      </p:sp>
+      <p:sp>
+        <p:nvSpPr>
+          <p:cNvPr id="3" name="Notes Placeholder 2"/>
+          <p:cNvSpPr>
+            <a:spLocks noGrp="1"/>
+          </p:cNvSpPr>
+          <p:nvPr>
+            <p:ph type="body" idx="3" sz="quarter"/>
+          </p:nvPr>
+        </p:nvSpPr>
+        <p:spPr/>
+        <p:txBody>
+          <a:bodyPr/>
+          <a:lstStyle/>
+          <a:p>
+            <a:r>
+              <a:t>TITLE — OPTION B (still). Same field frozen, and it keeps the single orange accent streamline. Safer over screen share, where slow fine detail is what video codecs smear first. Keep either this slide or option A, not both.</a:t>
+            </a:r>
+          </a:p>
+        </p:txBody>
+      </p:sp>
+      <p:sp>
+        <p:nvSpPr>
+          <p:cNvPr id="4" name="Slide Number Placeholder 3"/>
+          <p:cNvSpPr>
+            <a:spLocks noGrp="1"/>
+          </p:cNvSpPr>
+          <p:nvPr>
+            <p:ph type="sldNum" idx="5" sz="quarter"/>
+          </p:nvPr>
+        </p:nvSpPr>
+        <p:spPr/>
+      </p:sp>
+    </p:spTree>
+  </p:cSld>
+  <p:clrMapOvr>
+    <a:masterClrMapping/>
+  </p:clrMapOvr>
+</p:notes>
 </file>
 
 <file path=ppt/slideLayouts/slideLayout1.xml><?xml version="1.0" encoding="utf-8"?>
@@ -3475,6 +3966,383 @@
 </p:sld>
 </file>
 
+<file path=ppt/slides/slide10.xml><?xml version="1.0" encoding="utf-8"?>
+<p:sld xmlns:a="http://schemas.openxmlformats.org/drawingml/2006/main" xmlns:p="http://schemas.openxmlformats.org/presentationml/2006/main" xmlns:r="http://schemas.openxmlformats.org/officeDocument/2006/relationships">
+  <p:cSld>
+    <p:spTree>
+      <p:nvGrpSpPr>
+        <p:cNvPr id="1" name=""/>
+        <p:cNvGrpSpPr/>
+        <p:nvPr/>
+      </p:nvGrpSpPr>
+      <p:grpSpPr/>
+      <p:sp>
+        <p:nvSpPr>
+          <p:cNvPr id="2" name="Rectangle 1"/>
+          <p:cNvSpPr/>
+          <p:nvPr/>
+        </p:nvSpPr>
+        <p:spPr>
+          <a:xfrm>
+            <a:off x="0" y="0"/>
+            <a:ext cx="12191695" cy="6858000"/>
+          </a:xfrm>
+          <a:prstGeom prst="rect">
+            <a:avLst/>
+          </a:prstGeom>
+          <a:solidFill>
+            <a:srgbClr val="050F1C"/>
+          </a:solidFill>
+          <a:ln>
+            <a:noFill/>
+          </a:ln>
+          <a:effectLst/>
+        </p:spPr>
+        <p:txBody>
+          <a:bodyPr rtlCol="0" anchor="ctr"/>
+          <a:lstStyle/>
+          <a:p>
+            <a:pPr algn="ctr"/>
+          </a:p>
+        </p:txBody>
+      </p:sp>
+      <p:pic>
+        <p:nvPicPr>
+          <p:cNvPr id="3" name="Picture 2" descr="om-mark-dark.png"/>
+          <p:cNvPicPr>
+            <a:picLocks noChangeAspect="1"/>
+          </p:cNvPicPr>
+          <p:nvPr/>
+        </p:nvPicPr>
+        <p:blipFill>
+          <a:blip r:embed="rId2"/>
+          <a:stretch>
+            <a:fillRect/>
+          </a:stretch>
+        </p:blipFill>
+        <p:spPr>
+          <a:xfrm>
+            <a:off x="795528" y="612648"/>
+            <a:ext cx="420624" cy="420624"/>
+          </a:xfrm>
+          <a:prstGeom prst="rect">
+            <a:avLst/>
+          </a:prstGeom>
+        </p:spPr>
+      </p:pic>
+      <p:sp>
+        <p:nvSpPr>
+          <p:cNvPr id="4" name="TextBox 3"/>
+          <p:cNvSpPr txBox="1"/>
+          <p:nvPr/>
+        </p:nvSpPr>
+        <p:spPr>
+          <a:xfrm>
+            <a:off x="1261872" y="640080"/>
+            <a:ext cx="5486400" cy="457200"/>
+          </a:xfrm>
+          <a:prstGeom prst="rect">
+            <a:avLst/>
+          </a:prstGeom>
+          <a:noFill/>
+        </p:spPr>
+        <p:txBody>
+          <a:bodyPr wrap="square" anchor="t" lIns="0" rIns="0" tIns="0" bIns="0">
+            <a:spAutoFit/>
+          </a:bodyPr>
+          <a:lstStyle/>
+          <a:p>
+            <a:r>
+              <a:rPr sz="2200" b="0" i="0">
+                <a:solidFill>
+                  <a:srgbClr val="F4EFE3"/>
+                </a:solidFill>
+                <a:latin typeface="Instrument Serif"/>
+              </a:rPr>
+              <a:t>O</a:t>
+            </a:r>
+            <a:r>
+              <a:rPr sz="2200" b="0" i="0">
+                <a:solidFill>
+                  <a:srgbClr val="EDEEE4"/>
+                </a:solidFill>
+                <a:latin typeface="Instrument Serif"/>
+              </a:rPr>
+              <a:t>c</a:t>
+            </a:r>
+            <a:r>
+              <a:rPr sz="2200" b="0" i="0">
+                <a:solidFill>
+                  <a:srgbClr val="E6ECE4"/>
+                </a:solidFill>
+                <a:latin typeface="Instrument Serif"/>
+              </a:rPr>
+              <a:t>e</a:t>
+            </a:r>
+            <a:r>
+              <a:rPr sz="2200" b="0" i="0">
+                <a:solidFill>
+                  <a:srgbClr val="DFEBE5"/>
+                </a:solidFill>
+                <a:latin typeface="Instrument Serif"/>
+              </a:rPr>
+              <a:t>a</a:t>
+            </a:r>
+            <a:r>
+              <a:rPr sz="2200" b="0" i="0">
+                <a:solidFill>
+                  <a:srgbClr val="D8EAE6"/>
+                </a:solidFill>
+                <a:latin typeface="Instrument Serif"/>
+              </a:rPr>
+              <a:t>n</a:t>
+            </a:r>
+            <a:r>
+              <a:rPr sz="2200" b="0" i="0">
+                <a:solidFill>
+                  <a:srgbClr val="D1E8E6"/>
+                </a:solidFill>
+                <a:latin typeface="Instrument Serif"/>
+              </a:rPr>
+              <a:t> </a:t>
+            </a:r>
+            <a:r>
+              <a:rPr sz="2200" b="0" i="0">
+                <a:solidFill>
+                  <a:srgbClr val="CBE7E7"/>
+                </a:solidFill>
+                <a:latin typeface="Instrument Serif"/>
+              </a:rPr>
+              <a:t>M</a:t>
+            </a:r>
+            <a:r>
+              <a:rPr sz="2200" b="0" i="0">
+                <a:solidFill>
+                  <a:srgbClr val="C4E5E7"/>
+                </a:solidFill>
+                <a:latin typeface="Instrument Serif"/>
+              </a:rPr>
+              <a:t>o</a:t>
+            </a:r>
+            <a:r>
+              <a:rPr sz="2200" b="0" i="0">
+                <a:solidFill>
+                  <a:srgbClr val="BDE4E8"/>
+                </a:solidFill>
+                <a:latin typeface="Instrument Serif"/>
+              </a:rPr>
+              <a:t>t</a:t>
+            </a:r>
+            <a:r>
+              <a:rPr sz="2200" b="0" i="0">
+                <a:solidFill>
+                  <a:srgbClr val="B6E3E9"/>
+                </a:solidFill>
+                <a:latin typeface="Instrument Serif"/>
+              </a:rPr>
+              <a:t>i</a:t>
+            </a:r>
+            <a:r>
+              <a:rPr sz="2200" b="0" i="0">
+                <a:solidFill>
+                  <a:srgbClr val="AFE1E9"/>
+                </a:solidFill>
+                <a:latin typeface="Instrument Serif"/>
+              </a:rPr>
+              <a:t>o</a:t>
+            </a:r>
+            <a:r>
+              <a:rPr sz="2200" b="0" i="0">
+                <a:solidFill>
+                  <a:srgbClr val="A8E0EA"/>
+                </a:solidFill>
+                <a:latin typeface="Instrument Serif"/>
+              </a:rPr>
+              <a:t>n</a:t>
+            </a:r>
+            <a:r>
+              <a:rPr sz="2200" b="0" i="0">
+                <a:solidFill>
+                  <a:srgbClr val="A8E0EA"/>
+                </a:solidFill>
+                <a:latin typeface="Instrument Serif"/>
+              </a:rPr>
+              <a:t> </a:t>
+            </a:r>
+            <a:r>
+              <a:rPr sz="1000" b="0" i="0" spc="220">
+                <a:solidFill>
+                  <a:srgbClr val="A8E0EA"/>
+                </a:solidFill>
+                <a:latin typeface="IBM Plex Mono"/>
+              </a:rPr>
+              <a:t>ANALYTICS</a:t>
+            </a:r>
+          </a:p>
+        </p:txBody>
+      </p:sp>
+      <p:sp>
+        <p:nvSpPr>
+          <p:cNvPr id="5" name="Rectangle 4"/>
+          <p:cNvSpPr/>
+          <p:nvPr/>
+        </p:nvSpPr>
+        <p:spPr>
+          <a:xfrm>
+            <a:off x="841248" y="2286000"/>
+            <a:ext cx="1463040" cy="25400"/>
+          </a:xfrm>
+          <a:prstGeom prst="rect">
+            <a:avLst/>
+          </a:prstGeom>
+          <a:solidFill>
+            <a:srgbClr val="FF6A2B"/>
+          </a:solidFill>
+          <a:ln>
+            <a:noFill/>
+          </a:ln>
+          <a:effectLst/>
+        </p:spPr>
+        <p:txBody>
+          <a:bodyPr rtlCol="0" anchor="ctr"/>
+          <a:lstStyle/>
+          <a:p>
+            <a:pPr algn="ctr"/>
+          </a:p>
+        </p:txBody>
+      </p:sp>
+      <p:sp>
+        <p:nvSpPr>
+          <p:cNvPr id="6" name="TextBox 5"/>
+          <p:cNvSpPr txBox="1"/>
+          <p:nvPr/>
+        </p:nvSpPr>
+        <p:spPr>
+          <a:xfrm>
+            <a:off x="841248" y="2560320"/>
+            <a:ext cx="10058400" cy="1463040"/>
+          </a:xfrm>
+          <a:prstGeom prst="rect">
+            <a:avLst/>
+          </a:prstGeom>
+          <a:noFill/>
+        </p:spPr>
+        <p:txBody>
+          <a:bodyPr wrap="square" anchor="t" lIns="0" rIns="0" tIns="0" bIns="0">
+            <a:spAutoFit/>
+          </a:bodyPr>
+          <a:lstStyle/>
+          <a:p>
+            <a:pPr>
+              <a:lnSpc>
+                <a:spcPct val="103000"/>
+              </a:lnSpc>
+            </a:pPr>
+            <a:r>
+              <a:rPr sz="5600" b="0" i="0">
+                <a:solidFill>
+                  <a:srgbClr val="F4EFE3"/>
+                </a:solidFill>
+                <a:latin typeface="Instrument Serif"/>
+              </a:rPr>
+              <a:t>Tell us what you're
+</a:t>
+            </a:r>
+            <a:r>
+              <a:rPr sz="5600" b="0" i="1">
+                <a:solidFill>
+                  <a:srgbClr val="FF6A2B"/>
+                </a:solidFill>
+                <a:latin typeface="Instrument Serif"/>
+              </a:rPr>
+              <a:t>working on</a:t>
+            </a:r>
+            <a:r>
+              <a:rPr sz="5600" b="0" i="0">
+                <a:solidFill>
+                  <a:srgbClr val="F4EFE3"/>
+                </a:solidFill>
+                <a:latin typeface="Instrument Serif"/>
+              </a:rPr>
+              <a:t>.</a:t>
+            </a:r>
+          </a:p>
+        </p:txBody>
+      </p:sp>
+      <p:sp>
+        <p:nvSpPr>
+          <p:cNvPr id="7" name="TextBox 6"/>
+          <p:cNvSpPr txBox="1"/>
+          <p:nvPr/>
+        </p:nvSpPr>
+        <p:spPr>
+          <a:xfrm>
+            <a:off x="841248" y="4937760"/>
+            <a:ext cx="9144000" cy="1097280"/>
+          </a:xfrm>
+          <a:prstGeom prst="rect">
+            <a:avLst/>
+          </a:prstGeom>
+          <a:noFill/>
+        </p:spPr>
+        <p:txBody>
+          <a:bodyPr wrap="square" anchor="t" lIns="0" rIns="0" tIns="0" bIns="0">
+            <a:spAutoFit/>
+          </a:bodyPr>
+          <a:lstStyle/>
+          <a:p>
+            <a:r>
+              <a:rPr sz="1800" b="1" i="0">
+                <a:solidFill>
+                  <a:srgbClr val="F4EFE3"/>
+                </a:solidFill>
+                <a:latin typeface="IBM Plex Sans"/>
+              </a:rPr>
+              <a:t>Giles Fearon</a:t>
+            </a:r>
+          </a:p>
+          <a:p>
+            <a:pPr>
+              <a:spcBef>
+                <a:spcPts val="400"/>
+              </a:spcBef>
+            </a:pPr>
+            <a:r>
+              <a:rPr sz="1300" b="0" i="0">
+                <a:solidFill>
+                  <a:srgbClr val="A8E0EA"/>
+                </a:solidFill>
+                <a:latin typeface="IBM Plex Mono"/>
+              </a:rPr>
+              <a:t>giles@oceanmotionanalytics.com</a:t>
+            </a:r>
+          </a:p>
+          <a:p>
+            <a:pPr>
+              <a:spcBef>
+                <a:spcPts val="200"/>
+              </a:spcBef>
+            </a:pPr>
+            <a:r>
+              <a:rPr sz="1300" b="0" i="0">
+                <a:solidFill>
+                  <a:srgbClr val="8A94A2"/>
+                </a:solidFill>
+                <a:latin typeface="IBM Plex Mono"/>
+              </a:rPr>
+              <a:t>oceanmotionanalytics.com</a:t>
+            </a:r>
+          </a:p>
+        </p:txBody>
+      </p:sp>
+    </p:spTree>
+  </p:cSld>
+  <p:clrMapOvr>
+    <a:masterClrMapping/>
+  </p:clrMapOvr>
+</p:sld>
+</file>
+
 <file path=ppt/slides/slide2.xml><?xml version="1.0" encoding="utf-8"?>
 <p:sld xmlns:a="http://schemas.openxmlformats.org/drawingml/2006/main" xmlns:p="http://schemas.openxmlformats.org/presentationml/2006/main" xmlns:r="http://schemas.openxmlformats.org/officeDocument/2006/relationships">
   <p:cSld>
@@ -3485,22 +4353,46 @@
         <p:nvPr/>
       </p:nvGrpSpPr>
       <p:grpSpPr/>
-      <p:sp>
-        <p:nvSpPr>
-          <p:cNvPr id="2" name="Rectangle 1"/>
+      <p:pic>
+        <p:nvPicPr>
+          <p:cNvPr id="2" name="Picture 1" descr="hero-streamlines.png"/>
+          <p:cNvPicPr>
+            <a:picLocks noChangeAspect="1"/>
+          </p:cNvPicPr>
+          <p:nvPr/>
+        </p:nvPicPr>
+        <p:blipFill>
+          <a:blip r:embed="rId2"/>
+          <a:stretch>
+            <a:fillRect/>
+          </a:stretch>
+        </p:blipFill>
+        <p:spPr>
+          <a:xfrm>
+            <a:off x="0" y="0"/>
+            <a:ext cx="12191695" cy="6858000"/>
+          </a:xfrm>
+          <a:prstGeom prst="rect">
+            <a:avLst/>
+          </a:prstGeom>
+        </p:spPr>
+      </p:pic>
+      <p:sp>
+        <p:nvSpPr>
+          <p:cNvPr id="3" name="Rectangle 2"/>
           <p:cNvSpPr/>
           <p:nvPr/>
         </p:nvSpPr>
         <p:spPr>
           <a:xfrm>
-            <a:off x="0" y="0"/>
-            <a:ext cx="12191695" cy="6858000"/>
+            <a:off x="841248" y="2194560"/>
+            <a:ext cx="1463040" cy="25400"/>
           </a:xfrm>
           <a:prstGeom prst="rect">
             <a:avLst/>
           </a:prstGeom>
           <a:solidFill>
-            <a:srgbClr val="F4EFE3"/>
+            <a:srgbClr val="FF6A2B"/>
           </a:solidFill>
           <a:ln>
             <a:noFill/>
@@ -3515,46 +4407,40 @@
           </a:p>
         </p:txBody>
       </p:sp>
-      <p:sp>
-        <p:nvSpPr>
-          <p:cNvPr id="3" name="Rectangle 2"/>
-          <p:cNvSpPr/>
+      <p:pic>
+        <p:nvPicPr>
+          <p:cNvPr id="4" name="Picture 3" descr="om-mark-dark.png"/>
+          <p:cNvPicPr>
+            <a:picLocks noChangeAspect="1"/>
+          </p:cNvPicPr>
           <p:nvPr/>
-        </p:nvSpPr>
-        <p:spPr>
-          <a:xfrm>
-            <a:off x="841248" y="957580"/>
-            <a:ext cx="384048" cy="15240"/>
-          </a:xfrm>
-          <a:prstGeom prst="rect">
-            <a:avLst/>
-          </a:prstGeom>
-          <a:solidFill>
-            <a:srgbClr val="4A5665"/>
-          </a:solidFill>
-          <a:ln>
-            <a:noFill/>
-          </a:ln>
-          <a:effectLst/>
-        </p:spPr>
-        <p:txBody>
-          <a:bodyPr rtlCol="0" anchor="ctr"/>
-          <a:lstStyle/>
-          <a:p>
-            <a:pPr algn="ctr"/>
-          </a:p>
-        </p:txBody>
-      </p:sp>
-      <p:sp>
-        <p:nvSpPr>
-          <p:cNvPr id="4" name="TextBox 3"/>
+        </p:nvPicPr>
+        <p:blipFill>
+          <a:blip r:embed="rId3"/>
+          <a:stretch>
+            <a:fillRect/>
+          </a:stretch>
+        </p:blipFill>
+        <p:spPr>
+          <a:xfrm>
+            <a:off x="795528" y="612648"/>
+            <a:ext cx="420624" cy="420624"/>
+          </a:xfrm>
+          <a:prstGeom prst="rect">
+            <a:avLst/>
+          </a:prstGeom>
+        </p:spPr>
+      </p:pic>
+      <p:sp>
+        <p:nvSpPr>
+          <p:cNvPr id="5" name="TextBox 4"/>
           <p:cNvSpPr txBox="1"/>
           <p:nvPr/>
         </p:nvSpPr>
         <p:spPr>
           <a:xfrm>
-            <a:off x="1371600" y="868680"/>
-            <a:ext cx="5486400" cy="365760"/>
+            <a:off x="1261872" y="640080"/>
+            <a:ext cx="5486400" cy="457200"/>
           </a:xfrm>
           <a:prstGeom prst="rect">
             <a:avLst/>
@@ -3568,27 +4454,144 @@
           <a:lstStyle/>
           <a:p>
             <a:r>
-              <a:rPr sz="1200" b="0" i="0" spc="180">
-                <a:solidFill>
-                  <a:srgbClr val="4A5665"/>
+              <a:rPr sz="2200" b="0" i="0">
+                <a:solidFill>
+                  <a:srgbClr val="F4EFE3"/>
+                </a:solidFill>
+                <a:latin typeface="Instrument Serif"/>
+              </a:rPr>
+              <a:t>O</a:t>
+            </a:r>
+            <a:r>
+              <a:rPr sz="2200" b="0" i="0">
+                <a:solidFill>
+                  <a:srgbClr val="EDEEE4"/>
+                </a:solidFill>
+                <a:latin typeface="Instrument Serif"/>
+              </a:rPr>
+              <a:t>c</a:t>
+            </a:r>
+            <a:r>
+              <a:rPr sz="2200" b="0" i="0">
+                <a:solidFill>
+                  <a:srgbClr val="E6ECE4"/>
+                </a:solidFill>
+                <a:latin typeface="Instrument Serif"/>
+              </a:rPr>
+              <a:t>e</a:t>
+            </a:r>
+            <a:r>
+              <a:rPr sz="2200" b="0" i="0">
+                <a:solidFill>
+                  <a:srgbClr val="DFEBE5"/>
+                </a:solidFill>
+                <a:latin typeface="Instrument Serif"/>
+              </a:rPr>
+              <a:t>a</a:t>
+            </a:r>
+            <a:r>
+              <a:rPr sz="2200" b="0" i="0">
+                <a:solidFill>
+                  <a:srgbClr val="D8EAE6"/>
+                </a:solidFill>
+                <a:latin typeface="Instrument Serif"/>
+              </a:rPr>
+              <a:t>n</a:t>
+            </a:r>
+            <a:r>
+              <a:rPr sz="2200" b="0" i="0">
+                <a:solidFill>
+                  <a:srgbClr val="D1E8E6"/>
+                </a:solidFill>
+                <a:latin typeface="Instrument Serif"/>
+              </a:rPr>
+              <a:t> </a:t>
+            </a:r>
+            <a:r>
+              <a:rPr sz="2200" b="0" i="0">
+                <a:solidFill>
+                  <a:srgbClr val="CBE7E7"/>
+                </a:solidFill>
+                <a:latin typeface="Instrument Serif"/>
+              </a:rPr>
+              <a:t>M</a:t>
+            </a:r>
+            <a:r>
+              <a:rPr sz="2200" b="0" i="0">
+                <a:solidFill>
+                  <a:srgbClr val="C4E5E7"/>
+                </a:solidFill>
+                <a:latin typeface="Instrument Serif"/>
+              </a:rPr>
+              <a:t>o</a:t>
+            </a:r>
+            <a:r>
+              <a:rPr sz="2200" b="0" i="0">
+                <a:solidFill>
+                  <a:srgbClr val="BDE4E8"/>
+                </a:solidFill>
+                <a:latin typeface="Instrument Serif"/>
+              </a:rPr>
+              <a:t>t</a:t>
+            </a:r>
+            <a:r>
+              <a:rPr sz="2200" b="0" i="0">
+                <a:solidFill>
+                  <a:srgbClr val="B6E3E9"/>
+                </a:solidFill>
+                <a:latin typeface="Instrument Serif"/>
+              </a:rPr>
+              <a:t>i</a:t>
+            </a:r>
+            <a:r>
+              <a:rPr sz="2200" b="0" i="0">
+                <a:solidFill>
+                  <a:srgbClr val="AFE1E9"/>
+                </a:solidFill>
+                <a:latin typeface="Instrument Serif"/>
+              </a:rPr>
+              <a:t>o</a:t>
+            </a:r>
+            <a:r>
+              <a:rPr sz="2200" b="0" i="0">
+                <a:solidFill>
+                  <a:srgbClr val="A8E0EA"/>
+                </a:solidFill>
+                <a:latin typeface="Instrument Serif"/>
+              </a:rPr>
+              <a:t>n</a:t>
+            </a:r>
+            <a:r>
+              <a:rPr sz="2200" b="0" i="0">
+                <a:solidFill>
+                  <a:srgbClr val="A8E0EA"/>
+                </a:solidFill>
+                <a:latin typeface="Instrument Serif"/>
+              </a:rPr>
+              <a:t> </a:t>
+            </a:r>
+            <a:r>
+              <a:rPr sz="1000" b="0" i="0" spc="220">
+                <a:solidFill>
+                  <a:srgbClr val="A8E0EA"/>
                 </a:solidFill>
                 <a:latin typeface="IBM Plex Mono"/>
               </a:rPr>
-              <a:t>CONTENTS</a:t>
-            </a:r>
-          </a:p>
-        </p:txBody>
-      </p:sp>
-      <p:sp>
-        <p:nvSpPr>
-          <p:cNvPr id="5" name="TextBox 4"/>
+              <a:t>ANALYTICS</a:t>
+            </a:r>
+          </a:p>
+        </p:txBody>
+      </p:sp>
+      <p:sp>
+        <p:nvSpPr>
+          <p:cNvPr id="6" name="TextBox 5"/>
           <p:cNvSpPr txBox="1"/>
           <p:nvPr/>
         </p:nvSpPr>
         <p:spPr>
           <a:xfrm>
-            <a:off x="841248" y="1280160"/>
-            <a:ext cx="8229600" cy="914400"/>
+            <a:off x="841248" y="2468880"/>
+            <a:ext cx="9601200" cy="2560320"/>
           </a:xfrm>
           <a:prstGeom prst="rect">
             <a:avLst/>
@@ -3601,28 +4604,68 @@
           </a:bodyPr>
           <a:lstStyle/>
           <a:p>
-            <a:r>
-              <a:rPr sz="4400" b="0" i="0">
-                <a:solidFill>
-                  <a:srgbClr val="0B1420"/>
+            <a:pPr>
+              <a:lnSpc>
+                <a:spcPct val="102000"/>
+              </a:lnSpc>
+            </a:pPr>
+            <a:r>
+              <a:rPr sz="5800" b="0" i="0">
+                <a:solidFill>
+                  <a:srgbClr val="F4EFE3"/>
                 </a:solidFill>
                 <a:latin typeface="Instrument Serif"/>
               </a:rPr>
-              <a:t>What we'll cover.</a:t>
-            </a:r>
-          </a:p>
-        </p:txBody>
-      </p:sp>
-      <p:sp>
-        <p:nvSpPr>
-          <p:cNvPr id="6" name="TextBox 5"/>
+              <a:t>Ocean models, built for
+</a:t>
+            </a:r>
+          </a:p>
+          <a:p>
+            <a:pPr>
+              <a:lnSpc>
+                <a:spcPct val="102000"/>
+              </a:lnSpc>
+            </a:pPr>
+            <a:r>
+              <a:rPr sz="5800" b="0" i="0">
+                <a:solidFill>
+                  <a:srgbClr val="F4EFE3"/>
+                </a:solidFill>
+                <a:latin typeface="Instrument Serif"/>
+              </a:rPr>
+              <a:t>decisions </a:t>
+            </a:r>
+            <a:r>
+              <a:rPr sz="5800" b="0" i="1">
+                <a:solidFill>
+                  <a:srgbClr val="FF6A2B"/>
+                </a:solidFill>
+                <a:latin typeface="Instrument Serif"/>
+              </a:rPr>
+              <a:t>that can't wait</a:t>
+            </a:r>
+            <a:r>
+              <a:rPr sz="5800" b="0" i="0">
+                <a:solidFill>
+                  <a:srgbClr val="F4EFE3"/>
+                </a:solidFill>
+                <a:latin typeface="Instrument Serif"/>
+              </a:rPr>
+              <a:t>.</a:t>
+            </a:r>
+          </a:p>
+        </p:txBody>
+      </p:sp>
+      <p:sp>
+        <p:nvSpPr>
+          <p:cNvPr id="7" name="TextBox 6"/>
           <p:cNvSpPr txBox="1"/>
           <p:nvPr/>
         </p:nvSpPr>
         <p:spPr>
           <a:xfrm>
-            <a:off x="841248" y="2651760"/>
-            <a:ext cx="9144000" cy="3657600"/>
+            <a:off x="841248" y="5394960"/>
+            <a:ext cx="8229600" cy="914400"/>
           </a:xfrm>
           <a:prstGeom prst="rect">
             <a:avLst/>
@@ -3635,128 +4678,30 @@
           </a:bodyPr>
           <a:lstStyle/>
           <a:p>
+            <a:r>
+              <a:rPr sz="1100" b="0" i="0" spc="200">
+                <a:solidFill>
+                  <a:srgbClr val="A8E0EA"/>
+                </a:solidFill>
+                <a:latin typeface="IBM Plex Mono"/>
+              </a:rPr>
+              <a:t>PITCH DECK</a:t>
+            </a:r>
+          </a:p>
+          <a:p>
             <a:pPr>
-              <a:spcAft>
-                <a:spcPts val="1400"/>
-              </a:spcAft>
+              <a:spcBef>
+                <a:spcPts val="600"/>
+              </a:spcBef>
             </a:pPr>
             <a:r>
-              <a:rPr sz="1500" b="0" i="0" spc="80">
-                <a:solidFill>
-                  <a:srgbClr val="FF6A2B"/>
-                </a:solidFill>
-                <a:latin typeface="IBM Plex Mono"/>
-              </a:rPr>
-              <a:t>01</a:t>
-            </a:r>
-            <a:r>
-              <a:rPr sz="2200" b="0" i="0">
-                <a:solidFill>
-                  <a:srgbClr val="0B1420"/>
+              <a:rPr sz="1400" b="0" i="0">
+                <a:solidFill>
+                  <a:srgbClr val="8A94A2"/>
                 </a:solidFill>
                 <a:latin typeface="IBM Plex Sans"/>
               </a:rPr>
-              <a:t>    The problem you're solving</a:t>
-            </a:r>
-          </a:p>
-          <a:p>
-            <a:pPr>
-              <a:spcAft>
-                <a:spcPts val="1400"/>
-              </a:spcAft>
-            </a:pPr>
-            <a:r>
-              <a:rPr sz="1500" b="0" i="0" spc="80">
-                <a:solidFill>
-                  <a:srgbClr val="FF6A2B"/>
-                </a:solidFill>
-                <a:latin typeface="IBM Plex Mono"/>
-              </a:rPr>
-              <a:t>02</a:t>
-            </a:r>
-            <a:r>
-              <a:rPr sz="2200" b="0" i="0">
-                <a:solidFill>
-                  <a:srgbClr val="0B1420"/>
-                </a:solidFill>
-                <a:latin typeface="IBM Plex Sans"/>
-              </a:rPr>
-              <a:t>    How we model it</a:t>
-            </a:r>
-          </a:p>
-          <a:p>
-            <a:pPr>
-              <a:spcAft>
-                <a:spcPts val="1400"/>
-              </a:spcAft>
-            </a:pPr>
-            <a:r>
-              <a:rPr sz="1500" b="0" i="0" spc="80">
-                <a:solidFill>
-                  <a:srgbClr val="FF6A2B"/>
-                </a:solidFill>
-                <a:latin typeface="IBM Plex Mono"/>
-              </a:rPr>
-              <a:t>03</a:t>
-            </a:r>
-            <a:r>
-              <a:rPr sz="2200" b="0" i="0">
-                <a:solidFill>
-                  <a:srgbClr val="0B1420"/>
-                </a:solidFill>
-                <a:latin typeface="IBM Plex Sans"/>
-              </a:rPr>
-              <a:t>    Live forecast — your site</a:t>
-            </a:r>
-          </a:p>
-          <a:p>
-            <a:pPr>
-              <a:spcAft>
-                <a:spcPts val="1400"/>
-              </a:spcAft>
-            </a:pPr>
-            <a:r>
-              <a:rPr sz="1500" b="0" i="0" spc="80">
-                <a:solidFill>
-                  <a:srgbClr val="FF6A2B"/>
-                </a:solidFill>
-                <a:latin typeface="IBM Plex Mono"/>
-              </a:rPr>
-              <a:t>04</a:t>
-            </a:r>
-            <a:r>
-              <a:rPr sz="2200" b="0" i="0">
-                <a:solidFill>
-                  <a:srgbClr val="0B1420"/>
-                </a:solidFill>
-                <a:latin typeface="IBM Plex Sans"/>
-              </a:rPr>
-              <a:t>    What you'd receive, day to day</a:t>
-            </a:r>
-          </a:p>
-          <a:p>
-            <a:pPr>
-              <a:spcAft>
-                <a:spcPts val="1400"/>
-              </a:spcAft>
-            </a:pPr>
-            <a:r>
-              <a:rPr sz="1500" b="0" i="0" spc="80">
-                <a:solidFill>
-                  <a:srgbClr val="FF6A2B"/>
-                </a:solidFill>
-                <a:latin typeface="IBM Plex Mono"/>
-              </a:rPr>
-              <a:t>05</a:t>
-            </a:r>
-            <a:r>
-              <a:rPr sz="2200" b="0" i="0">
-                <a:solidFill>
-                  <a:srgbClr val="0B1420"/>
-                </a:solidFill>
-                <a:latin typeface="IBM Plex Sans"/>
-              </a:rPr>
-              <a:t>    Scope, timeline &amp; next steps</a:t>
+              <a:t>Prepared for [Client]  ·  August 2026</a:t>
             </a:r>
           </a:p>
         </p:txBody>
@@ -3794,7 +4739,7 @@
             <a:avLst/>
           </a:prstGeom>
           <a:solidFill>
-            <a:srgbClr val="091C33"/>
+            <a:srgbClr val="F4EFE3"/>
           </a:solidFill>
           <a:ln>
             <a:noFill/>
@@ -3817,14 +4762,14 @@
         </p:nvSpPr>
         <p:spPr>
           <a:xfrm>
-            <a:off x="841248" y="2832100"/>
+            <a:off x="841248" y="957580"/>
             <a:ext cx="384048" cy="15240"/>
           </a:xfrm>
           <a:prstGeom prst="rect">
             <a:avLst/>
           </a:prstGeom>
           <a:solidFill>
-            <a:srgbClr val="4FC3D7"/>
+            <a:srgbClr val="4A5665"/>
           </a:solidFill>
           <a:ln>
             <a:noFill/>
@@ -3847,7 +4792,7 @@
         </p:nvSpPr>
         <p:spPr>
           <a:xfrm>
-            <a:off x="1371600" y="2743200"/>
+            <a:off x="1371600" y="868680"/>
             <a:ext cx="5486400" cy="365760"/>
           </a:xfrm>
           <a:prstGeom prst="rect">
@@ -3864,11 +4809,11 @@
             <a:r>
               <a:rPr sz="1200" b="0" i="0" spc="180">
                 <a:solidFill>
-                  <a:srgbClr val="4FC3D7"/>
+                  <a:srgbClr val="4A5665"/>
                 </a:solidFill>
                 <a:latin typeface="IBM Plex Mono"/>
               </a:rPr>
-              <a:t>SECTION 01</a:t>
+              <a:t>CONTENTS</a:t>
             </a:r>
           </a:p>
         </p:txBody>
@@ -3881,8 +4826,8 @@
         </p:nvSpPr>
         <p:spPr>
           <a:xfrm>
-            <a:off x="841248" y="3200400"/>
-            <a:ext cx="10058400" cy="1828800"/>
+            <a:off x="841248" y="1280160"/>
+            <a:ext cx="8229600" cy="914400"/>
           </a:xfrm>
           <a:prstGeom prst="rect">
             <a:avLst/>
@@ -3895,37 +4840,162 @@
           </a:bodyPr>
           <a:lstStyle/>
           <a:p>
+            <a:r>
+              <a:rPr sz="4400" b="0" i="0">
+                <a:solidFill>
+                  <a:srgbClr val="0B1420"/>
+                </a:solidFill>
+                <a:latin typeface="Instrument Serif"/>
+              </a:rPr>
+              <a:t>What we'll cover.</a:t>
+            </a:r>
+          </a:p>
+        </p:txBody>
+      </p:sp>
+      <p:sp>
+        <p:nvSpPr>
+          <p:cNvPr id="6" name="TextBox 5"/>
+          <p:cNvSpPr txBox="1"/>
+          <p:nvPr/>
+        </p:nvSpPr>
+        <p:spPr>
+          <a:xfrm>
+            <a:off x="841248" y="2651760"/>
+            <a:ext cx="9144000" cy="3657600"/>
+          </a:xfrm>
+          <a:prstGeom prst="rect">
+            <a:avLst/>
+          </a:prstGeom>
+          <a:noFill/>
+        </p:spPr>
+        <p:txBody>
+          <a:bodyPr wrap="square" anchor="t" lIns="0" rIns="0" tIns="0" bIns="0">
+            <a:spAutoFit/>
+          </a:bodyPr>
+          <a:lstStyle/>
+          <a:p>
             <a:pPr>
-              <a:lnSpc>
-                <a:spcPct val="103000"/>
-              </a:lnSpc>
+              <a:spcAft>
+                <a:spcPts val="1400"/>
+              </a:spcAft>
             </a:pPr>
             <a:r>
-              <a:rPr sz="6000" b="0" i="0">
-                <a:solidFill>
-                  <a:srgbClr val="F4EFE3"/>
-                </a:solidFill>
-                <a:latin typeface="Instrument Serif"/>
-              </a:rPr>
-              <a:t>How we </a:t>
-            </a:r>
-            <a:r>
-              <a:rPr sz="6000" b="0" i="1">
+              <a:rPr sz="1500" b="0" i="0" spc="80">
                 <a:solidFill>
                   <a:srgbClr val="FF6A2B"/>
                 </a:solidFill>
-                <a:latin typeface="Instrument Serif"/>
-              </a:rPr>
-              <a:t>model</a:t>
-            </a:r>
-            <a:r>
-              <a:rPr sz="6000" b="0" i="0">
-                <a:solidFill>
-                  <a:srgbClr val="F4EFE3"/>
-                </a:solidFill>
-                <a:latin typeface="Instrument Serif"/>
-              </a:rPr>
-              <a:t> your water.</a:t>
+                <a:latin typeface="IBM Plex Mono"/>
+              </a:rPr>
+              <a:t>01</a:t>
+            </a:r>
+            <a:r>
+              <a:rPr sz="2200" b="0" i="0">
+                <a:solidFill>
+                  <a:srgbClr val="0B1420"/>
+                </a:solidFill>
+                <a:latin typeface="IBM Plex Sans"/>
+              </a:rPr>
+              <a:t>    The problem you're solving</a:t>
+            </a:r>
+          </a:p>
+          <a:p>
+            <a:pPr>
+              <a:spcAft>
+                <a:spcPts val="1400"/>
+              </a:spcAft>
+            </a:pPr>
+            <a:r>
+              <a:rPr sz="1500" b="0" i="0" spc="80">
+                <a:solidFill>
+                  <a:srgbClr val="FF6A2B"/>
+                </a:solidFill>
+                <a:latin typeface="IBM Plex Mono"/>
+              </a:rPr>
+              <a:t>02</a:t>
+            </a:r>
+            <a:r>
+              <a:rPr sz="2200" b="0" i="0">
+                <a:solidFill>
+                  <a:srgbClr val="0B1420"/>
+                </a:solidFill>
+                <a:latin typeface="IBM Plex Sans"/>
+              </a:rPr>
+              <a:t>    How we model it</a:t>
+            </a:r>
+          </a:p>
+          <a:p>
+            <a:pPr>
+              <a:spcAft>
+                <a:spcPts val="1400"/>
+              </a:spcAft>
+            </a:pPr>
+            <a:r>
+              <a:rPr sz="1500" b="0" i="0" spc="80">
+                <a:solidFill>
+                  <a:srgbClr val="FF6A2B"/>
+                </a:solidFill>
+                <a:latin typeface="IBM Plex Mono"/>
+              </a:rPr>
+              <a:t>03</a:t>
+            </a:r>
+            <a:r>
+              <a:rPr sz="2200" b="0" i="0">
+                <a:solidFill>
+                  <a:srgbClr val="0B1420"/>
+                </a:solidFill>
+                <a:latin typeface="IBM Plex Sans"/>
+              </a:rPr>
+              <a:t>    Live forecast — your site</a:t>
+            </a:r>
+          </a:p>
+          <a:p>
+            <a:pPr>
+              <a:spcAft>
+                <a:spcPts val="1400"/>
+              </a:spcAft>
+            </a:pPr>
+            <a:r>
+              <a:rPr sz="1500" b="0" i="0" spc="80">
+                <a:solidFill>
+                  <a:srgbClr val="FF6A2B"/>
+                </a:solidFill>
+                <a:latin typeface="IBM Plex Mono"/>
+              </a:rPr>
+              <a:t>04</a:t>
+            </a:r>
+            <a:r>
+              <a:rPr sz="2200" b="0" i="0">
+                <a:solidFill>
+                  <a:srgbClr val="0B1420"/>
+                </a:solidFill>
+                <a:latin typeface="IBM Plex Sans"/>
+              </a:rPr>
+              <a:t>    What you'd receive, day to day</a:t>
+            </a:r>
+          </a:p>
+          <a:p>
+            <a:pPr>
+              <a:spcAft>
+                <a:spcPts val="1400"/>
+              </a:spcAft>
+            </a:pPr>
+            <a:r>
+              <a:rPr sz="1500" b="0" i="0" spc="80">
+                <a:solidFill>
+                  <a:srgbClr val="FF6A2B"/>
+                </a:solidFill>
+                <a:latin typeface="IBM Plex Mono"/>
+              </a:rPr>
+              <a:t>05</a:t>
+            </a:r>
+            <a:r>
+              <a:rPr sz="2200" b="0" i="0">
+                <a:solidFill>
+                  <a:srgbClr val="0B1420"/>
+                </a:solidFill>
+                <a:latin typeface="IBM Plex Sans"/>
+              </a:rPr>
+              <a:t>    Scope, timeline &amp; next steps</a:t>
             </a:r>
           </a:p>
         </p:txBody>
@@ -3963,7 +5033,7 @@
             <a:avLst/>
           </a:prstGeom>
           <a:solidFill>
-            <a:srgbClr val="F4EFE3"/>
+            <a:srgbClr val="091C33"/>
           </a:solidFill>
           <a:ln>
             <a:noFill/>
@@ -3986,14 +5056,14 @@
         </p:nvSpPr>
         <p:spPr>
           <a:xfrm>
-            <a:off x="841248" y="957580"/>
+            <a:off x="841248" y="2832100"/>
             <a:ext cx="384048" cy="15240"/>
           </a:xfrm>
           <a:prstGeom prst="rect">
             <a:avLst/>
           </a:prstGeom>
           <a:solidFill>
-            <a:srgbClr val="4A5665"/>
+            <a:srgbClr val="4FC3D7"/>
           </a:solidFill>
           <a:ln>
             <a:noFill/>
@@ -4016,7 +5086,7 @@
         </p:nvSpPr>
         <p:spPr>
           <a:xfrm>
-            <a:off x="1371600" y="868680"/>
+            <a:off x="1371600" y="2743200"/>
             <a:ext cx="5486400" cy="365760"/>
           </a:xfrm>
           <a:prstGeom prst="rect">
@@ -4033,11 +5103,11 @@
             <a:r>
               <a:rPr sz="1200" b="0" i="0" spc="180">
                 <a:solidFill>
-                  <a:srgbClr val="4A5665"/>
+                  <a:srgbClr val="4FC3D7"/>
                 </a:solidFill>
                 <a:latin typeface="IBM Plex Mono"/>
               </a:rPr>
-              <a:t>APPROACH</a:t>
+              <a:t>SECTION 01</a:t>
             </a:r>
           </a:p>
         </p:txBody>
@@ -4050,8 +5120,8 @@
         </p:nvSpPr>
         <p:spPr>
           <a:xfrm>
-            <a:off x="841248" y="1280160"/>
-            <a:ext cx="9601200" cy="1280160"/>
+            <a:off x="841248" y="3200400"/>
+            <a:ext cx="10058400" cy="1828800"/>
           </a:xfrm>
           <a:prstGeom prst="rect">
             <a:avLst/>
@@ -4066,142 +5136,35 @@
           <a:p>
             <a:pPr>
               <a:lnSpc>
-                <a:spcPct val="104000"/>
+                <a:spcPct val="103000"/>
               </a:lnSpc>
             </a:pPr>
             <a:r>
-              <a:rPr sz="4200" b="0" i="0">
-                <a:solidFill>
-                  <a:srgbClr val="0B1420"/>
+              <a:rPr sz="6000" b="0" i="0">
+                <a:solidFill>
+                  <a:srgbClr val="F4EFE3"/>
                 </a:solidFill>
                 <a:latin typeface="Instrument Serif"/>
               </a:rPr>
-              <a:t>Physics first, </a:t>
-            </a:r>
-            <a:r>
-              <a:rPr sz="4200" b="0" i="1">
+              <a:t>How we </a:t>
+            </a:r>
+            <a:r>
+              <a:rPr sz="6000" b="0" i="1">
                 <a:solidFill>
                   <a:srgbClr val="FF6A2B"/>
                 </a:solidFill>
                 <a:latin typeface="Instrument Serif"/>
               </a:rPr>
-              <a:t>tuned to your site</a:t>
-            </a:r>
-            <a:r>
-              <a:rPr sz="4200" b="0" i="0">
-                <a:solidFill>
-                  <a:srgbClr val="0B1420"/>
+              <a:t>model</a:t>
+            </a:r>
+            <a:r>
+              <a:rPr sz="6000" b="0" i="0">
+                <a:solidFill>
+                  <a:srgbClr val="F4EFE3"/>
                 </a:solidFill>
                 <a:latin typeface="Instrument Serif"/>
               </a:rPr>
-              <a:t>.</a:t>
-            </a:r>
-          </a:p>
-        </p:txBody>
-      </p:sp>
-      <p:sp>
-        <p:nvSpPr>
-          <p:cNvPr id="6" name="TextBox 5"/>
-          <p:cNvSpPr txBox="1"/>
-          <p:nvPr/>
-        </p:nvSpPr>
-        <p:spPr>
-          <a:xfrm>
-            <a:off x="841248" y="2834640"/>
-            <a:ext cx="7680960" cy="3108960"/>
-          </a:xfrm>
-          <a:prstGeom prst="rect">
-            <a:avLst/>
-          </a:prstGeom>
-          <a:noFill/>
-        </p:spPr>
-        <p:txBody>
-          <a:bodyPr wrap="square" anchor="t" lIns="0" rIns="0" tIns="0" bIns="0">
-            <a:spAutoFit/>
-          </a:bodyPr>
-          <a:lstStyle/>
-          <a:p>
-            <a:pPr>
-              <a:lnSpc>
-                <a:spcPct val="140000"/>
-              </a:lnSpc>
-              <a:spcAft>
-                <a:spcPts val="1600"/>
-              </a:spcAft>
-            </a:pPr>
-            <a:r>
-              <a:rPr sz="1900" b="0" i="0">
-                <a:solidFill>
-                  <a:srgbClr val="FF6A2B"/>
-                </a:solidFill>
-                <a:latin typeface="IBM Plex Sans"/>
-              </a:rPr>
-              <a:t>—  </a:t>
-            </a:r>
-            <a:r>
-              <a:rPr sz="1900" b="0" i="0">
-                <a:solidFill>
-                  <a:srgbClr val="4A5665"/>
-                </a:solidFill>
-                <a:latin typeface="IBM Plex Sans"/>
-              </a:rPr>
-              <a:t>A regional ocean model nested down to the port, plant or site of interest.</a:t>
-            </a:r>
-          </a:p>
-          <a:p>
-            <a:pPr>
-              <a:lnSpc>
-                <a:spcPct val="140000"/>
-              </a:lnSpc>
-              <a:spcAft>
-                <a:spcPts val="1600"/>
-              </a:spcAft>
-            </a:pPr>
-            <a:r>
-              <a:rPr sz="1900" b="0" i="0">
-                <a:solidFill>
-                  <a:srgbClr val="FF6A2B"/>
-                </a:solidFill>
-                <a:latin typeface="IBM Plex Sans"/>
-              </a:rPr>
-              <a:t>—  </a:t>
-            </a:r>
-            <a:r>
-              <a:rPr sz="1900" b="0" i="0">
-                <a:solidFill>
-                  <a:srgbClr val="4A5665"/>
-                </a:solidFill>
-                <a:latin typeface="IBM Plex Sans"/>
-              </a:rPr>
-              <a:t>Forced with the best available atmospheric, tidal and boundary data, updated every day.</a:t>
-            </a:r>
-          </a:p>
-          <a:p>
-            <a:pPr>
-              <a:lnSpc>
-                <a:spcPct val="140000"/>
-              </a:lnSpc>
-              <a:spcAft>
-                <a:spcPts val="1600"/>
-              </a:spcAft>
-            </a:pPr>
-            <a:r>
-              <a:rPr sz="1900" b="0" i="0">
-                <a:solidFill>
-                  <a:srgbClr val="FF6A2B"/>
-                </a:solidFill>
-                <a:latin typeface="IBM Plex Sans"/>
-              </a:rPr>
-              <a:t>—  </a:t>
-            </a:r>
-            <a:r>
-              <a:rPr sz="1900" b="0" i="0">
-                <a:solidFill>
-                  <a:srgbClr val="4A5665"/>
-                </a:solidFill>
-                <a:latin typeface="IBM Plex Sans"/>
-              </a:rPr>
-              <a:t>Outputs framed as the decision you actually make — operability windows, go/no-go, thresholds.</a:t>
+              <a:t> your water.</a:t>
             </a:r>
           </a:p>
         </p:txBody>
@@ -4313,7 +5276,7 @@
                 </a:solidFill>
                 <a:latin typeface="IBM Plex Mono"/>
               </a:rPr>
-              <a:t>WHAT WE DO</a:t>
+              <a:t>APPROACH</a:t>
             </a:r>
           </a:p>
         </p:txBody>
@@ -4327,7 +5290,7 @@
         <p:spPr>
           <a:xfrm>
             <a:off x="841248" y="1280160"/>
-            <a:ext cx="9144000" cy="914400"/>
+            <a:ext cx="9601200" cy="1280160"/>
           </a:xfrm>
           <a:prstGeom prst="rect">
             <a:avLst/>
@@ -4340,6 +5303,11 @@
           </a:bodyPr>
           <a:lstStyle/>
           <a:p>
+            <a:pPr>
+              <a:lnSpc>
+                <a:spcPct val="104000"/>
+              </a:lnSpc>
+            </a:pPr>
             <a:r>
               <a:rPr sz="4200" b="0" i="0">
                 <a:solidFill>
@@ -4347,149 +5315,39 @@
                 </a:solidFill>
                 <a:latin typeface="Instrument Serif"/>
               </a:rPr>
-              <a:t>From physics to decisions.</a:t>
-            </a:r>
-          </a:p>
-        </p:txBody>
-      </p:sp>
-      <p:sp>
-        <p:nvSpPr>
-          <p:cNvPr id="6" name="Rectangle 5"/>
-          <p:cNvSpPr/>
-          <p:nvPr/>
-        </p:nvSpPr>
-        <p:spPr>
-          <a:xfrm>
-            <a:off x="841248" y="2651760"/>
-            <a:ext cx="5074920" cy="3108960"/>
-          </a:xfrm>
-          <a:prstGeom prst="rect">
-            <a:avLst/>
-          </a:prstGeom>
-          <a:solidFill>
-            <a:srgbClr val="EFE9D9"/>
-          </a:solidFill>
-          <a:ln>
-            <a:noFill/>
-          </a:ln>
-          <a:effectLst/>
-        </p:spPr>
-        <p:txBody>
-          <a:bodyPr rtlCol="0" anchor="ctr"/>
-          <a:lstStyle/>
-          <a:p>
-            <a:pPr algn="ctr"/>
-          </a:p>
-        </p:txBody>
-      </p:sp>
-      <p:sp>
-        <p:nvSpPr>
-          <p:cNvPr id="7" name="Rectangle 6"/>
-          <p:cNvSpPr/>
-          <p:nvPr/>
-        </p:nvSpPr>
-        <p:spPr>
-          <a:xfrm>
-            <a:off x="841248" y="2651760"/>
-            <a:ext cx="5074920" cy="38100"/>
-          </a:xfrm>
-          <a:prstGeom prst="rect">
-            <a:avLst/>
-          </a:prstGeom>
-          <a:solidFill>
-            <a:srgbClr val="FF6A2B"/>
-          </a:solidFill>
-          <a:ln>
-            <a:noFill/>
-          </a:ln>
-          <a:effectLst/>
-        </p:spPr>
-        <p:txBody>
-          <a:bodyPr rtlCol="0" anchor="ctr"/>
-          <a:lstStyle/>
-          <a:p>
-            <a:pPr algn="ctr"/>
-          </a:p>
-        </p:txBody>
-      </p:sp>
-      <p:sp>
-        <p:nvSpPr>
-          <p:cNvPr id="8" name="TextBox 7"/>
+              <a:t>Physics first, </a:t>
+            </a:r>
+            <a:r>
+              <a:rPr sz="4200" b="0" i="1">
+                <a:solidFill>
+                  <a:srgbClr val="FF6A2B"/>
+                </a:solidFill>
+                <a:latin typeface="Instrument Serif"/>
+              </a:rPr>
+              <a:t>tuned to your site</a:t>
+            </a:r>
+            <a:r>
+              <a:rPr sz="4200" b="0" i="0">
+                <a:solidFill>
+                  <a:srgbClr val="0B1420"/>
+                </a:solidFill>
+                <a:latin typeface="Instrument Serif"/>
+              </a:rPr>
+              <a:t>.</a:t>
+            </a:r>
+          </a:p>
+        </p:txBody>
+      </p:sp>
+      <p:sp>
+        <p:nvSpPr>
+          <p:cNvPr id="6" name="TextBox 5"/>
           <p:cNvSpPr txBox="1"/>
           <p:nvPr/>
         </p:nvSpPr>
         <p:spPr>
           <a:xfrm>
-            <a:off x="1252728" y="2971800"/>
-            <a:ext cx="4251960" cy="365760"/>
-          </a:xfrm>
-          <a:prstGeom prst="rect">
-            <a:avLst/>
-          </a:prstGeom>
-          <a:noFill/>
-        </p:spPr>
-        <p:txBody>
-          <a:bodyPr wrap="square" anchor="t" lIns="0" rIns="0" tIns="0" bIns="0">
-            <a:spAutoFit/>
-          </a:bodyPr>
-          <a:lstStyle/>
-          <a:p>
-            <a:r>
-              <a:rPr sz="1100" b="0" i="0" spc="180">
-                <a:solidFill>
-                  <a:srgbClr val="FF6A2B"/>
-                </a:solidFill>
-                <a:latin typeface="IBM Plex Mono"/>
-              </a:rPr>
-              <a:t>RECURRING</a:t>
-            </a:r>
-          </a:p>
-        </p:txBody>
-      </p:sp>
-      <p:sp>
-        <p:nvSpPr>
-          <p:cNvPr id="9" name="TextBox 8"/>
-          <p:cNvSpPr txBox="1"/>
-          <p:nvPr/>
-        </p:nvSpPr>
-        <p:spPr>
-          <a:xfrm>
-            <a:off x="1252728" y="3429000"/>
-            <a:ext cx="4251960" cy="640080"/>
-          </a:xfrm>
-          <a:prstGeom prst="rect">
-            <a:avLst/>
-          </a:prstGeom>
-          <a:noFill/>
-        </p:spPr>
-        <p:txBody>
-          <a:bodyPr wrap="square" anchor="t" lIns="0" rIns="0" tIns="0" bIns="0">
-            <a:spAutoFit/>
-          </a:bodyPr>
-          <a:lstStyle/>
-          <a:p>
-            <a:r>
-              <a:rPr sz="2800" b="0" i="0">
-                <a:solidFill>
-                  <a:srgbClr val="0B1420"/>
-                </a:solidFill>
-                <a:latin typeface="Instrument Serif"/>
-              </a:rPr>
-              <a:t>We run them every day</a:t>
-            </a:r>
-          </a:p>
-        </p:txBody>
-      </p:sp>
-      <p:sp>
-        <p:nvSpPr>
-          <p:cNvPr id="10" name="TextBox 9"/>
-          <p:cNvSpPr txBox="1"/>
-          <p:nvPr/>
-        </p:nvSpPr>
-        <p:spPr>
-          <a:xfrm>
-            <a:off x="1252728" y="4206240"/>
-            <a:ext cx="4251960" cy="1463040"/>
+            <a:off x="841248" y="2834640"/>
+            <a:ext cx="7680960" cy="3108960"/>
           </a:xfrm>
           <a:prstGeom prst="rect">
             <a:avLst/>
@@ -4506,182 +5364,83 @@
               <a:lnSpc>
                 <a:spcPct val="140000"/>
               </a:lnSpc>
+              <a:spcAft>
+                <a:spcPts val="1600"/>
+              </a:spcAft>
             </a:pPr>
             <a:r>
-              <a:rPr sz="1500" b="0" i="0">
+              <a:rPr sz="1900" b="0" i="0">
+                <a:solidFill>
+                  <a:srgbClr val="FF6A2B"/>
+                </a:solidFill>
+                <a:latin typeface="IBM Plex Sans"/>
+              </a:rPr>
+              <a:t>—  </a:t>
+            </a:r>
+            <a:r>
+              <a:rPr sz="1900" b="0" i="0">
                 <a:solidFill>
                   <a:srgbClr val="4A5665"/>
                 </a:solidFill>
                 <a:latin typeface="IBM Plex Sans"/>
               </a:rPr>
-              <a:t>Regional and hyper-local forecasts at your site, updated daily. Operability windows, go/no-go calls, custom thresholds.</a:t>
-            </a:r>
-          </a:p>
-        </p:txBody>
-      </p:sp>
-      <p:sp>
-        <p:nvSpPr>
-          <p:cNvPr id="11" name="Rectangle 10"/>
-          <p:cNvSpPr/>
-          <p:nvPr/>
-        </p:nvSpPr>
-        <p:spPr>
-          <a:xfrm>
-            <a:off x="6373368" y="2651760"/>
-            <a:ext cx="5074920" cy="3108960"/>
-          </a:xfrm>
-          <a:prstGeom prst="rect">
-            <a:avLst/>
-          </a:prstGeom>
-          <a:solidFill>
-            <a:srgbClr val="EFE9D9"/>
-          </a:solidFill>
-          <a:ln>
-            <a:noFill/>
-          </a:ln>
-          <a:effectLst/>
-        </p:spPr>
-        <p:txBody>
-          <a:bodyPr rtlCol="0" anchor="ctr"/>
-          <a:lstStyle/>
-          <a:p>
-            <a:pPr algn="ctr"/>
-          </a:p>
-        </p:txBody>
-      </p:sp>
-      <p:sp>
-        <p:nvSpPr>
-          <p:cNvPr id="12" name="Rectangle 11"/>
-          <p:cNvSpPr/>
-          <p:nvPr/>
-        </p:nvSpPr>
-        <p:spPr>
-          <a:xfrm>
-            <a:off x="6373368" y="2651760"/>
-            <a:ext cx="5074920" cy="38100"/>
-          </a:xfrm>
-          <a:prstGeom prst="rect">
-            <a:avLst/>
-          </a:prstGeom>
-          <a:solidFill>
-            <a:srgbClr val="FF6A2B"/>
-          </a:solidFill>
-          <a:ln>
-            <a:noFill/>
-          </a:ln>
-          <a:effectLst/>
-        </p:spPr>
-        <p:txBody>
-          <a:bodyPr rtlCol="0" anchor="ctr"/>
-          <a:lstStyle/>
-          <a:p>
-            <a:pPr algn="ctr"/>
-          </a:p>
-        </p:txBody>
-      </p:sp>
-      <p:sp>
-        <p:nvSpPr>
-          <p:cNvPr id="13" name="TextBox 12"/>
-          <p:cNvSpPr txBox="1"/>
-          <p:nvPr/>
-        </p:nvSpPr>
-        <p:spPr>
-          <a:xfrm>
-            <a:off x="6784848" y="2971800"/>
-            <a:ext cx="4251960" cy="365760"/>
-          </a:xfrm>
-          <a:prstGeom prst="rect">
-            <a:avLst/>
-          </a:prstGeom>
-          <a:noFill/>
-        </p:spPr>
-        <p:txBody>
-          <a:bodyPr wrap="square" anchor="t" lIns="0" rIns="0" tIns="0" bIns="0">
-            <a:spAutoFit/>
-          </a:bodyPr>
-          <a:lstStyle/>
-          <a:p>
-            <a:r>
-              <a:rPr sz="1100" b="0" i="0" spc="180">
-                <a:solidFill>
-                  <a:srgbClr val="FF6A2B"/>
-                </a:solidFill>
-                <a:latin typeface="IBM Plex Mono"/>
-              </a:rPr>
-              <a:t>ONE-OFF</a:t>
-            </a:r>
-          </a:p>
-        </p:txBody>
-      </p:sp>
-      <p:sp>
-        <p:nvSpPr>
-          <p:cNvPr id="14" name="TextBox 13"/>
-          <p:cNvSpPr txBox="1"/>
-          <p:nvPr/>
-        </p:nvSpPr>
-        <p:spPr>
-          <a:xfrm>
-            <a:off x="6784848" y="3429000"/>
-            <a:ext cx="4251960" cy="640080"/>
-          </a:xfrm>
-          <a:prstGeom prst="rect">
-            <a:avLst/>
-          </a:prstGeom>
-          <a:noFill/>
-        </p:spPr>
-        <p:txBody>
-          <a:bodyPr wrap="square" anchor="t" lIns="0" rIns="0" tIns="0" bIns="0">
-            <a:spAutoFit/>
-          </a:bodyPr>
-          <a:lstStyle/>
-          <a:p>
-            <a:r>
-              <a:rPr sz="2800" b="0" i="0">
-                <a:solidFill>
-                  <a:srgbClr val="0B1420"/>
-                </a:solidFill>
-                <a:latin typeface="Instrument Serif"/>
-              </a:rPr>
-              <a:t>We build ocean models</a:t>
-            </a:r>
-          </a:p>
-        </p:txBody>
-      </p:sp>
-      <p:sp>
-        <p:nvSpPr>
-          <p:cNvPr id="15" name="TextBox 14"/>
-          <p:cNvSpPr txBox="1"/>
-          <p:nvPr/>
-        </p:nvSpPr>
-        <p:spPr>
-          <a:xfrm>
-            <a:off x="6784848" y="4206240"/>
-            <a:ext cx="4251960" cy="1463040"/>
-          </a:xfrm>
-          <a:prstGeom prst="rect">
-            <a:avLst/>
-          </a:prstGeom>
-          <a:noFill/>
-        </p:spPr>
-        <p:txBody>
-          <a:bodyPr wrap="square" anchor="t" lIns="0" rIns="0" tIns="0" bIns="0">
-            <a:spAutoFit/>
-          </a:bodyPr>
-          <a:lstStyle/>
+              <a:t>A regional ocean model nested down to the port, plant or site of interest.</a:t>
+            </a:r>
+          </a:p>
           <a:p>
             <a:pPr>
               <a:lnSpc>
                 <a:spcPct val="140000"/>
               </a:lnSpc>
+              <a:spcAft>
+                <a:spcPts val="1600"/>
+              </a:spcAft>
             </a:pPr>
             <a:r>
-              <a:rPr sz="1500" b="0" i="0">
+              <a:rPr sz="1900" b="0" i="0">
+                <a:solidFill>
+                  <a:srgbClr val="FF6A2B"/>
+                </a:solidFill>
+                <a:latin typeface="IBM Plex Sans"/>
+              </a:rPr>
+              <a:t>—  </a:t>
+            </a:r>
+            <a:r>
+              <a:rPr sz="1900" b="0" i="0">
                 <a:solidFill>
                   <a:srgbClr val="4A5665"/>
                 </a:solidFill>
                 <a:latin typeface="IBM Plex Sans"/>
               </a:rPr>
-              <a:t>Model development, hindcasts, dispersion and transport, design criteria. Each engagement scoped to a specific question.</a:t>
+              <a:t>Forced with the best available atmospheric, tidal and boundary data, updated every day.</a:t>
+            </a:r>
+          </a:p>
+          <a:p>
+            <a:pPr>
+              <a:lnSpc>
+                <a:spcPct val="140000"/>
+              </a:lnSpc>
+              <a:spcAft>
+                <a:spcPts val="1600"/>
+              </a:spcAft>
+            </a:pPr>
+            <a:r>
+              <a:rPr sz="1900" b="0" i="0">
+                <a:solidFill>
+                  <a:srgbClr val="FF6A2B"/>
+                </a:solidFill>
+                <a:latin typeface="IBM Plex Sans"/>
+              </a:rPr>
+              <a:t>—  </a:t>
+            </a:r>
+            <a:r>
+              <a:rPr sz="1900" b="0" i="0">
+                <a:solidFill>
+                  <a:srgbClr val="4A5665"/>
+                </a:solidFill>
+                <a:latin typeface="IBM Plex Sans"/>
+              </a:rPr>
+              <a:t>Outputs framed as the decision you actually make — operability windows, go/no-go, thresholds.</a:t>
             </a:r>
           </a:p>
         </p:txBody>
@@ -4736,14 +5495,44 @@
       </p:sp>
       <p:sp>
         <p:nvSpPr>
-          <p:cNvPr id="3" name="TextBox 2"/>
+          <p:cNvPr id="3" name="Rectangle 2"/>
+          <p:cNvSpPr/>
+          <p:nvPr/>
+        </p:nvSpPr>
+        <p:spPr>
+          <a:xfrm>
+            <a:off x="841248" y="957580"/>
+            <a:ext cx="384048" cy="15240"/>
+          </a:xfrm>
+          <a:prstGeom prst="rect">
+            <a:avLst/>
+          </a:prstGeom>
+          <a:solidFill>
+            <a:srgbClr val="4A5665"/>
+          </a:solidFill>
+          <a:ln>
+            <a:noFill/>
+          </a:ln>
+          <a:effectLst/>
+        </p:spPr>
+        <p:txBody>
+          <a:bodyPr rtlCol="0" anchor="ctr"/>
+          <a:lstStyle/>
+          <a:p>
+            <a:pPr algn="ctr"/>
+          </a:p>
+        </p:txBody>
+      </p:sp>
+      <p:sp>
+        <p:nvSpPr>
+          <p:cNvPr id="4" name="TextBox 3"/>
           <p:cNvSpPr txBox="1"/>
           <p:nvPr/>
         </p:nvSpPr>
         <p:spPr>
           <a:xfrm>
-            <a:off x="841248" y="0"/>
-            <a:ext cx="10515600" cy="6858000"/>
+            <a:off x="1371600" y="868680"/>
+            <a:ext cx="5486400" cy="365760"/>
           </a:xfrm>
           <a:prstGeom prst="rect">
             <a:avLst/>
@@ -4751,44 +5540,387 @@
           <a:noFill/>
         </p:spPr>
         <p:txBody>
-          <a:bodyPr wrap="square" anchor="ctr" lIns="0" rIns="0" tIns="0" bIns="0">
+          <a:bodyPr wrap="square" anchor="t" lIns="0" rIns="0" tIns="0" bIns="0">
             <a:spAutoFit/>
           </a:bodyPr>
           <a:lstStyle/>
           <a:p>
-            <a:pPr algn="l">
+            <a:r>
+              <a:rPr sz="1200" b="0" i="0" spc="180">
+                <a:solidFill>
+                  <a:srgbClr val="4A5665"/>
+                </a:solidFill>
+                <a:latin typeface="IBM Plex Mono"/>
+              </a:rPr>
+              <a:t>WHAT WE DO</a:t>
+            </a:r>
+          </a:p>
+        </p:txBody>
+      </p:sp>
+      <p:sp>
+        <p:nvSpPr>
+          <p:cNvPr id="5" name="TextBox 4"/>
+          <p:cNvSpPr txBox="1"/>
+          <p:nvPr/>
+        </p:nvSpPr>
+        <p:spPr>
+          <a:xfrm>
+            <a:off x="841248" y="1280160"/>
+            <a:ext cx="9144000" cy="914400"/>
+          </a:xfrm>
+          <a:prstGeom prst="rect">
+            <a:avLst/>
+          </a:prstGeom>
+          <a:noFill/>
+        </p:spPr>
+        <p:txBody>
+          <a:bodyPr wrap="square" anchor="t" lIns="0" rIns="0" tIns="0" bIns="0">
+            <a:spAutoFit/>
+          </a:bodyPr>
+          <a:lstStyle/>
+          <a:p>
+            <a:r>
+              <a:rPr sz="4200" b="0" i="0">
+                <a:solidFill>
+                  <a:srgbClr val="0B1420"/>
+                </a:solidFill>
+                <a:latin typeface="Instrument Serif"/>
+              </a:rPr>
+              <a:t>From physics to decisions.</a:t>
+            </a:r>
+          </a:p>
+        </p:txBody>
+      </p:sp>
+      <p:sp>
+        <p:nvSpPr>
+          <p:cNvPr id="6" name="Rectangle 5"/>
+          <p:cNvSpPr/>
+          <p:nvPr/>
+        </p:nvSpPr>
+        <p:spPr>
+          <a:xfrm>
+            <a:off x="841248" y="2651760"/>
+            <a:ext cx="5074920" cy="3108960"/>
+          </a:xfrm>
+          <a:prstGeom prst="rect">
+            <a:avLst/>
+          </a:prstGeom>
+          <a:solidFill>
+            <a:srgbClr val="EFE9D9"/>
+          </a:solidFill>
+          <a:ln>
+            <a:noFill/>
+          </a:ln>
+          <a:effectLst/>
+        </p:spPr>
+        <p:txBody>
+          <a:bodyPr rtlCol="0" anchor="ctr"/>
+          <a:lstStyle/>
+          <a:p>
+            <a:pPr algn="ctr"/>
+          </a:p>
+        </p:txBody>
+      </p:sp>
+      <p:sp>
+        <p:nvSpPr>
+          <p:cNvPr id="7" name="Rectangle 6"/>
+          <p:cNvSpPr/>
+          <p:nvPr/>
+        </p:nvSpPr>
+        <p:spPr>
+          <a:xfrm>
+            <a:off x="841248" y="2651760"/>
+            <a:ext cx="5074920" cy="38100"/>
+          </a:xfrm>
+          <a:prstGeom prst="rect">
+            <a:avLst/>
+          </a:prstGeom>
+          <a:solidFill>
+            <a:srgbClr val="FF6A2B"/>
+          </a:solidFill>
+          <a:ln>
+            <a:noFill/>
+          </a:ln>
+          <a:effectLst/>
+        </p:spPr>
+        <p:txBody>
+          <a:bodyPr rtlCol="0" anchor="ctr"/>
+          <a:lstStyle/>
+          <a:p>
+            <a:pPr algn="ctr"/>
+          </a:p>
+        </p:txBody>
+      </p:sp>
+      <p:sp>
+        <p:nvSpPr>
+          <p:cNvPr id="8" name="TextBox 7"/>
+          <p:cNvSpPr txBox="1"/>
+          <p:nvPr/>
+        </p:nvSpPr>
+        <p:spPr>
+          <a:xfrm>
+            <a:off x="1252728" y="2971800"/>
+            <a:ext cx="4251960" cy="365760"/>
+          </a:xfrm>
+          <a:prstGeom prst="rect">
+            <a:avLst/>
+          </a:prstGeom>
+          <a:noFill/>
+        </p:spPr>
+        <p:txBody>
+          <a:bodyPr wrap="square" anchor="t" lIns="0" rIns="0" tIns="0" bIns="0">
+            <a:spAutoFit/>
+          </a:bodyPr>
+          <a:lstStyle/>
+          <a:p>
+            <a:r>
+              <a:rPr sz="1100" b="0" i="0" spc="180">
+                <a:solidFill>
+                  <a:srgbClr val="FF6A2B"/>
+                </a:solidFill>
+                <a:latin typeface="IBM Plex Mono"/>
+              </a:rPr>
+              <a:t>RECURRING</a:t>
+            </a:r>
+          </a:p>
+        </p:txBody>
+      </p:sp>
+      <p:sp>
+        <p:nvSpPr>
+          <p:cNvPr id="9" name="TextBox 8"/>
+          <p:cNvSpPr txBox="1"/>
+          <p:nvPr/>
+        </p:nvSpPr>
+        <p:spPr>
+          <a:xfrm>
+            <a:off x="1252728" y="3429000"/>
+            <a:ext cx="4251960" cy="640080"/>
+          </a:xfrm>
+          <a:prstGeom prst="rect">
+            <a:avLst/>
+          </a:prstGeom>
+          <a:noFill/>
+        </p:spPr>
+        <p:txBody>
+          <a:bodyPr wrap="square" anchor="t" lIns="0" rIns="0" tIns="0" bIns="0">
+            <a:spAutoFit/>
+          </a:bodyPr>
+          <a:lstStyle/>
+          <a:p>
+            <a:r>
+              <a:rPr sz="2800" b="0" i="0">
+                <a:solidFill>
+                  <a:srgbClr val="0B1420"/>
+                </a:solidFill>
+                <a:latin typeface="Instrument Serif"/>
+              </a:rPr>
+              <a:t>We run them every day</a:t>
+            </a:r>
+          </a:p>
+        </p:txBody>
+      </p:sp>
+      <p:sp>
+        <p:nvSpPr>
+          <p:cNvPr id="10" name="TextBox 9"/>
+          <p:cNvSpPr txBox="1"/>
+          <p:nvPr/>
+        </p:nvSpPr>
+        <p:spPr>
+          <a:xfrm>
+            <a:off x="1252728" y="4206240"/>
+            <a:ext cx="4251960" cy="1463040"/>
+          </a:xfrm>
+          <a:prstGeom prst="rect">
+            <a:avLst/>
+          </a:prstGeom>
+          <a:noFill/>
+        </p:spPr>
+        <p:txBody>
+          <a:bodyPr wrap="square" anchor="t" lIns="0" rIns="0" tIns="0" bIns="0">
+            <a:spAutoFit/>
+          </a:bodyPr>
+          <a:lstStyle/>
+          <a:p>
+            <a:pPr>
               <a:lnSpc>
-                <a:spcPct val="106000"/>
+                <a:spcPct val="140000"/>
               </a:lnSpc>
             </a:pPr>
             <a:r>
-              <a:rPr sz="4600" b="0" i="0">
+              <a:rPr sz="1500" b="0" i="0">
+                <a:solidFill>
+                  <a:srgbClr val="4A5665"/>
+                </a:solidFill>
+                <a:latin typeface="IBM Plex Sans"/>
+              </a:rPr>
+              <a:t>Regional and hyper-local forecasts at your site, updated daily. Operability windows, go/no-go calls, custom thresholds.</a:t>
+            </a:r>
+          </a:p>
+        </p:txBody>
+      </p:sp>
+      <p:sp>
+        <p:nvSpPr>
+          <p:cNvPr id="11" name="Rectangle 10"/>
+          <p:cNvSpPr/>
+          <p:nvPr/>
+        </p:nvSpPr>
+        <p:spPr>
+          <a:xfrm>
+            <a:off x="6373368" y="2651760"/>
+            <a:ext cx="5074920" cy="3108960"/>
+          </a:xfrm>
+          <a:prstGeom prst="rect">
+            <a:avLst/>
+          </a:prstGeom>
+          <a:solidFill>
+            <a:srgbClr val="EFE9D9"/>
+          </a:solidFill>
+          <a:ln>
+            <a:noFill/>
+          </a:ln>
+          <a:effectLst/>
+        </p:spPr>
+        <p:txBody>
+          <a:bodyPr rtlCol="0" anchor="ctr"/>
+          <a:lstStyle/>
+          <a:p>
+            <a:pPr algn="ctr"/>
+          </a:p>
+        </p:txBody>
+      </p:sp>
+      <p:sp>
+        <p:nvSpPr>
+          <p:cNvPr id="12" name="Rectangle 11"/>
+          <p:cNvSpPr/>
+          <p:nvPr/>
+        </p:nvSpPr>
+        <p:spPr>
+          <a:xfrm>
+            <a:off x="6373368" y="2651760"/>
+            <a:ext cx="5074920" cy="38100"/>
+          </a:xfrm>
+          <a:prstGeom prst="rect">
+            <a:avLst/>
+          </a:prstGeom>
+          <a:solidFill>
+            <a:srgbClr val="FF6A2B"/>
+          </a:solidFill>
+          <a:ln>
+            <a:noFill/>
+          </a:ln>
+          <a:effectLst/>
+        </p:spPr>
+        <p:txBody>
+          <a:bodyPr rtlCol="0" anchor="ctr"/>
+          <a:lstStyle/>
+          <a:p>
+            <a:pPr algn="ctr"/>
+          </a:p>
+        </p:txBody>
+      </p:sp>
+      <p:sp>
+        <p:nvSpPr>
+          <p:cNvPr id="13" name="TextBox 12"/>
+          <p:cNvSpPr txBox="1"/>
+          <p:nvPr/>
+        </p:nvSpPr>
+        <p:spPr>
+          <a:xfrm>
+            <a:off x="6784848" y="2971800"/>
+            <a:ext cx="4251960" cy="365760"/>
+          </a:xfrm>
+          <a:prstGeom prst="rect">
+            <a:avLst/>
+          </a:prstGeom>
+          <a:noFill/>
+        </p:spPr>
+        <p:txBody>
+          <a:bodyPr wrap="square" anchor="t" lIns="0" rIns="0" tIns="0" bIns="0">
+            <a:spAutoFit/>
+          </a:bodyPr>
+          <a:lstStyle/>
+          <a:p>
+            <a:r>
+              <a:rPr sz="1100" b="0" i="0" spc="180">
+                <a:solidFill>
+                  <a:srgbClr val="FF6A2B"/>
+                </a:solidFill>
+                <a:latin typeface="IBM Plex Mono"/>
+              </a:rPr>
+              <a:t>ONE-OFF</a:t>
+            </a:r>
+          </a:p>
+        </p:txBody>
+      </p:sp>
+      <p:sp>
+        <p:nvSpPr>
+          <p:cNvPr id="14" name="TextBox 13"/>
+          <p:cNvSpPr txBox="1"/>
+          <p:nvPr/>
+        </p:nvSpPr>
+        <p:spPr>
+          <a:xfrm>
+            <a:off x="6784848" y="3429000"/>
+            <a:ext cx="4251960" cy="640080"/>
+          </a:xfrm>
+          <a:prstGeom prst="rect">
+            <a:avLst/>
+          </a:prstGeom>
+          <a:noFill/>
+        </p:spPr>
+        <p:txBody>
+          <a:bodyPr wrap="square" anchor="t" lIns="0" rIns="0" tIns="0" bIns="0">
+            <a:spAutoFit/>
+          </a:bodyPr>
+          <a:lstStyle/>
+          <a:p>
+            <a:r>
+              <a:rPr sz="2800" b="0" i="0">
                 <a:solidFill>
                   <a:srgbClr val="0B1420"/>
                 </a:solidFill>
                 <a:latin typeface="Instrument Serif"/>
               </a:rPr>
-              <a:t>The people who have to know
-what the sea is doing </a:t>
-            </a:r>
-            <a:r>
-              <a:rPr sz="4600" b="0" i="1">
-                <a:solidFill>
-                  <a:srgbClr val="FF6A2B"/>
-                </a:solidFill>
-                <a:latin typeface="Instrument Serif"/>
-              </a:rPr>
-              <a:t>shouldn't
-be guessing</a:t>
-            </a:r>
-            <a:r>
-              <a:rPr sz="4600" b="0" i="0">
-                <a:solidFill>
-                  <a:srgbClr val="0B1420"/>
-                </a:solidFill>
-                <a:latin typeface="Instrument Serif"/>
-              </a:rPr>
-              <a:t>.</a:t>
+              <a:t>We build ocean models</a:t>
+            </a:r>
+          </a:p>
+        </p:txBody>
+      </p:sp>
+      <p:sp>
+        <p:nvSpPr>
+          <p:cNvPr id="15" name="TextBox 14"/>
+          <p:cNvSpPr txBox="1"/>
+          <p:nvPr/>
+        </p:nvSpPr>
+        <p:spPr>
+          <a:xfrm>
+            <a:off x="6784848" y="4206240"/>
+            <a:ext cx="4251960" cy="1463040"/>
+          </a:xfrm>
+          <a:prstGeom prst="rect">
+            <a:avLst/>
+          </a:prstGeom>
+          <a:noFill/>
+        </p:spPr>
+        <p:txBody>
+          <a:bodyPr wrap="square" anchor="t" lIns="0" rIns="0" tIns="0" bIns="0">
+            <a:spAutoFit/>
+          </a:bodyPr>
+          <a:lstStyle/>
+          <a:p>
+            <a:pPr>
+              <a:lnSpc>
+                <a:spcPct val="140000"/>
+              </a:lnSpc>
+            </a:pPr>
+            <a:r>
+              <a:rPr sz="1500" b="0" i="0">
+                <a:solidFill>
+                  <a:srgbClr val="4A5665"/>
+                </a:solidFill>
+                <a:latin typeface="IBM Plex Sans"/>
+              </a:rPr>
+              <a:t>Model development, hindcasts, dispersion and transport, design criteria. Each engagement scoped to a specific question.</a:t>
             </a:r>
           </a:p>
         </p:txBody>
@@ -4826,7 +5958,7 @@
             <a:avLst/>
           </a:prstGeom>
           <a:solidFill>
-            <a:srgbClr val="050F1C"/>
+            <a:srgbClr val="F4EFE3"/>
           </a:solidFill>
           <a:ln>
             <a:noFill/>
@@ -4843,144 +5975,14 @@
       </p:sp>
       <p:sp>
         <p:nvSpPr>
-          <p:cNvPr id="3" name="Rectangle 2"/>
-          <p:cNvSpPr/>
-          <p:nvPr/>
-        </p:nvSpPr>
-        <p:spPr>
-          <a:xfrm>
-            <a:off x="841248" y="728980"/>
-            <a:ext cx="384048" cy="15240"/>
-          </a:xfrm>
-          <a:prstGeom prst="rect">
-            <a:avLst/>
-          </a:prstGeom>
-          <a:solidFill>
-            <a:srgbClr val="4FC3D7"/>
-          </a:solidFill>
-          <a:ln>
-            <a:noFill/>
-          </a:ln>
-          <a:effectLst/>
-        </p:spPr>
-        <p:txBody>
-          <a:bodyPr rtlCol="0" anchor="ctr"/>
-          <a:lstStyle/>
-          <a:p>
-            <a:pPr algn="ctr"/>
-          </a:p>
-        </p:txBody>
-      </p:sp>
-      <p:sp>
-        <p:nvSpPr>
-          <p:cNvPr id="4" name="TextBox 3"/>
+          <p:cNvPr id="3" name="TextBox 2"/>
           <p:cNvSpPr txBox="1"/>
           <p:nvPr/>
         </p:nvSpPr>
         <p:spPr>
           <a:xfrm>
-            <a:off x="1371600" y="640080"/>
-            <a:ext cx="5486400" cy="365760"/>
-          </a:xfrm>
-          <a:prstGeom prst="rect">
-            <a:avLst/>
-          </a:prstGeom>
-          <a:noFill/>
-        </p:spPr>
-        <p:txBody>
-          <a:bodyPr wrap="square" anchor="t" lIns="0" rIns="0" tIns="0" bIns="0">
-            <a:spAutoFit/>
-          </a:bodyPr>
-          <a:lstStyle/>
-          <a:p>
-            <a:r>
-              <a:rPr sz="1200" b="0" i="0" spc="180">
-                <a:solidFill>
-                  <a:srgbClr val="4FC3D7"/>
-                </a:solidFill>
-                <a:latin typeface="IBM Plex Mono"/>
-              </a:rPr>
-              <a:t>LIVE FORECAST</a:t>
-            </a:r>
-          </a:p>
-        </p:txBody>
-      </p:sp>
-      <p:sp>
-        <p:nvSpPr>
-          <p:cNvPr id="5" name="TextBox 4"/>
-          <p:cNvSpPr txBox="1"/>
-          <p:nvPr/>
-        </p:nvSpPr>
-        <p:spPr>
-          <a:xfrm>
-            <a:off x="841248" y="1024128"/>
-            <a:ext cx="9144000" cy="640080"/>
-          </a:xfrm>
-          <a:prstGeom prst="rect">
-            <a:avLst/>
-          </a:prstGeom>
-          <a:noFill/>
-        </p:spPr>
-        <p:txBody>
-          <a:bodyPr wrap="square" anchor="t" lIns="0" rIns="0" tIns="0" bIns="0">
-            <a:spAutoFit/>
-          </a:bodyPr>
-          <a:lstStyle/>
-          <a:p>
-            <a:r>
-              <a:rPr sz="3400" b="0" i="0">
-                <a:solidFill>
-                  <a:srgbClr val="F4EFE3"/>
-                </a:solidFill>
-                <a:latin typeface="Instrument Serif"/>
-              </a:rPr>
-              <a:t>Your site, today.</a:t>
-            </a:r>
-          </a:p>
-        </p:txBody>
-      </p:sp>
-      <p:sp>
-        <p:nvSpPr>
-          <p:cNvPr id="6" name="Rectangle 5"/>
-          <p:cNvSpPr/>
-          <p:nvPr/>
-        </p:nvSpPr>
-        <p:spPr>
-          <a:xfrm>
-            <a:off x="841248" y="1874519"/>
-            <a:ext cx="10515600" cy="4297680"/>
-          </a:xfrm>
-          <a:prstGeom prst="rect">
-            <a:avLst/>
-          </a:prstGeom>
-          <a:solidFill>
-            <a:srgbClr val="13294A"/>
-          </a:solidFill>
-          <a:ln w="12700">
-            <a:solidFill>
-              <a:srgbClr val="4FC3D7"/>
-            </a:solidFill>
-          </a:ln>
-          <a:effectLst/>
-        </p:spPr>
-        <p:txBody>
-          <a:bodyPr rtlCol="0" anchor="ctr"/>
-          <a:lstStyle/>
-          <a:p>
-            <a:pPr algn="ctr"/>
-          </a:p>
-        </p:txBody>
-      </p:sp>
-      <p:sp>
-        <p:nvSpPr>
-          <p:cNvPr id="7" name="TextBox 6"/>
-          <p:cNvSpPr txBox="1"/>
-          <p:nvPr/>
-        </p:nvSpPr>
-        <p:spPr>
-          <a:xfrm>
-            <a:off x="841248" y="3749039"/>
-            <a:ext cx="10515600" cy="548640"/>
+            <a:off x="841248" y="0"/>
+            <a:ext cx="10515600" cy="6858000"/>
           </a:xfrm>
           <a:prstGeom prst="rect">
             <a:avLst/>
@@ -4993,15 +5995,39 @@
           </a:bodyPr>
           <a:lstStyle/>
           <a:p>
-            <a:pPr algn="ctr"/>
-            <a:r>
-              <a:rPr sz="1200" b="0" i="0" spc="120">
-                <a:solidFill>
-                  <a:srgbClr val="A8E0EA"/>
-                </a:solidFill>
-                <a:latin typeface="IBM Plex Mono"/>
-              </a:rPr>
-              <a:t>[ REPLACE WITH DASHBOARD SCREENSHOT / RECORDING ]</a:t>
+            <a:pPr algn="l">
+              <a:lnSpc>
+                <a:spcPct val="106000"/>
+              </a:lnSpc>
+            </a:pPr>
+            <a:r>
+              <a:rPr sz="4600" b="0" i="0">
+                <a:solidFill>
+                  <a:srgbClr val="0B1420"/>
+                </a:solidFill>
+                <a:latin typeface="Instrument Serif"/>
+              </a:rPr>
+              <a:t>The people who have to know
+what the sea is doing </a:t>
+            </a:r>
+            <a:r>
+              <a:rPr sz="4600" b="0" i="1">
+                <a:solidFill>
+                  <a:srgbClr val="FF6A2B"/>
+                </a:solidFill>
+                <a:latin typeface="Instrument Serif"/>
+              </a:rPr>
+              <a:t>shouldn't
+be guessing</a:t>
+            </a:r>
+            <a:r>
+              <a:rPr sz="4600" b="0" i="0">
+                <a:solidFill>
+                  <a:srgbClr val="0B1420"/>
+                </a:solidFill>
+                <a:latin typeface="Instrument Serif"/>
+              </a:rPr>
+              <a:t>.</a:t>
             </a:r>
           </a:p>
         </p:txBody>
@@ -5039,7 +6065,7 @@
             <a:avLst/>
           </a:prstGeom>
           <a:solidFill>
-            <a:srgbClr val="091C33"/>
+            <a:srgbClr val="050F1C"/>
           </a:solidFill>
           <a:ln>
             <a:noFill/>
@@ -5062,7 +6088,7 @@
         </p:nvSpPr>
         <p:spPr>
           <a:xfrm>
-            <a:off x="841248" y="957580"/>
+            <a:off x="841248" y="728980"/>
             <a:ext cx="384048" cy="15240"/>
           </a:xfrm>
           <a:prstGeom prst="rect">
@@ -5092,7 +6118,7 @@
         </p:nvSpPr>
         <p:spPr>
           <a:xfrm>
-            <a:off x="1371600" y="868680"/>
+            <a:off x="1371600" y="640080"/>
             <a:ext cx="5486400" cy="365760"/>
           </a:xfrm>
           <a:prstGeom prst="rect">
@@ -5113,7 +6139,7 @@
                 </a:solidFill>
                 <a:latin typeface="IBM Plex Mono"/>
               </a:rPr>
-              <a:t>WHAT YOU'D RECEIVE</a:t>
+              <a:t>LIVE FORECAST</a:t>
             </a:r>
           </a:p>
         </p:txBody>
@@ -5126,8 +6152,8 @@
         </p:nvSpPr>
         <p:spPr>
           <a:xfrm>
-            <a:off x="841248" y="1280160"/>
-            <a:ext cx="9144000" cy="914400"/>
+            <a:off x="841248" y="1024128"/>
+            <a:ext cx="9144000" cy="640080"/>
           </a:xfrm>
           <a:prstGeom prst="rect">
             <a:avLst/>
@@ -5141,48 +6167,46 @@
           <a:lstStyle/>
           <a:p>
             <a:r>
-              <a:rPr sz="4200" b="0" i="0">
+              <a:rPr sz="3400" b="0" i="0">
                 <a:solidFill>
                   <a:srgbClr val="F4EFE3"/>
                 </a:solidFill>
                 <a:latin typeface="Instrument Serif"/>
               </a:rPr>
-              <a:t>Every single day.</a:t>
-            </a:r>
-          </a:p>
-        </p:txBody>
-      </p:sp>
-      <p:sp>
-        <p:nvSpPr>
-          <p:cNvPr id="6" name="TextBox 5"/>
-          <p:cNvSpPr txBox="1"/>
+              <a:t>Your site, today.</a:t>
+            </a:r>
+          </a:p>
+        </p:txBody>
+      </p:sp>
+      <p:sp>
+        <p:nvSpPr>
+          <p:cNvPr id="6" name="Rectangle 5"/>
+          <p:cNvSpPr/>
           <p:nvPr/>
         </p:nvSpPr>
         <p:spPr>
           <a:xfrm>
-            <a:off x="841248" y="3017520"/>
-            <a:ext cx="3291840" cy="1188720"/>
-          </a:xfrm>
-          <a:prstGeom prst="rect">
-            <a:avLst/>
-          </a:prstGeom>
-          <a:noFill/>
-        </p:spPr>
-        <p:txBody>
-          <a:bodyPr wrap="square" anchor="t" lIns="0" rIns="0" tIns="0" bIns="0">
-            <a:spAutoFit/>
-          </a:bodyPr>
-          <a:lstStyle/>
-          <a:p>
-            <a:r>
-              <a:rPr sz="6600" b="0" i="0">
-                <a:solidFill>
-                  <a:srgbClr val="FF6A2B"/>
-                </a:solidFill>
-                <a:latin typeface="Instrument Serif"/>
-              </a:rPr>
-              <a:t>Daily</a:t>
-            </a:r>
+            <a:off x="841248" y="1874519"/>
+            <a:ext cx="10515600" cy="4297680"/>
+          </a:xfrm>
+          <a:prstGeom prst="rect">
+            <a:avLst/>
+          </a:prstGeom>
+          <a:solidFill>
+            <a:srgbClr val="13294A"/>
+          </a:solidFill>
+          <a:ln w="12700">
+            <a:solidFill>
+              <a:srgbClr val="4FC3D7"/>
+            </a:solidFill>
+          </a:ln>
+          <a:effectLst/>
+        </p:spPr>
+        <p:txBody>
+          <a:bodyPr rtlCol="0" anchor="ctr"/>
+          <a:lstStyle/>
+          <a:p>
+            <a:pPr algn="ctr"/>
           </a:p>
         </p:txBody>
       </p:sp>
@@ -5194,8 +6218,8 @@
         </p:nvSpPr>
         <p:spPr>
           <a:xfrm>
-            <a:off x="841248" y="4297680"/>
-            <a:ext cx="3291840" cy="548640"/>
+            <a:off x="841248" y="3749039"/>
+            <a:ext cx="10515600" cy="548640"/>
           </a:xfrm>
           <a:prstGeom prst="rect">
             <a:avLst/>
@@ -5203,155 +6227,20 @@
           <a:noFill/>
         </p:spPr>
         <p:txBody>
-          <a:bodyPr wrap="square" anchor="t" lIns="0" rIns="0" tIns="0" bIns="0">
+          <a:bodyPr wrap="square" anchor="ctr" lIns="0" rIns="0" tIns="0" bIns="0">
             <a:spAutoFit/>
           </a:bodyPr>
           <a:lstStyle/>
           <a:p>
-            <a:r>
-              <a:rPr sz="1200" b="0" i="0" spc="150">
+            <a:pPr algn="ctr"/>
+            <a:r>
+              <a:rPr sz="1200" b="0" i="0" spc="120">
                 <a:solidFill>
                   <a:srgbClr val="A8E0EA"/>
                 </a:solidFill>
                 <a:latin typeface="IBM Plex Mono"/>
               </a:rPr>
-              <a:t>FORECAST CYCLE</a:t>
-            </a:r>
-          </a:p>
-        </p:txBody>
-      </p:sp>
-      <p:sp>
-        <p:nvSpPr>
-          <p:cNvPr id="8" name="TextBox 7"/>
-          <p:cNvSpPr txBox="1"/>
-          <p:nvPr/>
-        </p:nvSpPr>
-        <p:spPr>
-          <a:xfrm>
-            <a:off x="4315968" y="3017520"/>
-            <a:ext cx="3291840" cy="1188720"/>
-          </a:xfrm>
-          <a:prstGeom prst="rect">
-            <a:avLst/>
-          </a:prstGeom>
-          <a:noFill/>
-        </p:spPr>
-        <p:txBody>
-          <a:bodyPr wrap="square" anchor="t" lIns="0" rIns="0" tIns="0" bIns="0">
-            <a:spAutoFit/>
-          </a:bodyPr>
-          <a:lstStyle/>
-          <a:p>
-            <a:r>
-              <a:rPr sz="6600" b="0" i="0">
-                <a:solidFill>
-                  <a:srgbClr val="FF6A2B"/>
-                </a:solidFill>
-                <a:latin typeface="Instrument Serif"/>
-              </a:rPr>
-              <a:t>72 h</a:t>
-            </a:r>
-          </a:p>
-        </p:txBody>
-      </p:sp>
-      <p:sp>
-        <p:nvSpPr>
-          <p:cNvPr id="9" name="TextBox 8"/>
-          <p:cNvSpPr txBox="1"/>
-          <p:nvPr/>
-        </p:nvSpPr>
-        <p:spPr>
-          <a:xfrm>
-            <a:off x="4315968" y="4297680"/>
-            <a:ext cx="3291840" cy="548640"/>
-          </a:xfrm>
-          <a:prstGeom prst="rect">
-            <a:avLst/>
-          </a:prstGeom>
-          <a:noFill/>
-        </p:spPr>
-        <p:txBody>
-          <a:bodyPr wrap="square" anchor="t" lIns="0" rIns="0" tIns="0" bIns="0">
-            <a:spAutoFit/>
-          </a:bodyPr>
-          <a:lstStyle/>
-          <a:p>
-            <a:r>
-              <a:rPr sz="1200" b="0" i="0" spc="150">
-                <a:solidFill>
-                  <a:srgbClr val="A8E0EA"/>
-                </a:solidFill>
-                <a:latin typeface="IBM Plex Mono"/>
-              </a:rPr>
-              <a:t>LEAD TIME</a:t>
-            </a:r>
-          </a:p>
-        </p:txBody>
-      </p:sp>
-      <p:sp>
-        <p:nvSpPr>
-          <p:cNvPr id="10" name="TextBox 9"/>
-          <p:cNvSpPr txBox="1"/>
-          <p:nvPr/>
-        </p:nvSpPr>
-        <p:spPr>
-          <a:xfrm>
-            <a:off x="7790688" y="3017520"/>
-            <a:ext cx="3291840" cy="1188720"/>
-          </a:xfrm>
-          <a:prstGeom prst="rect">
-            <a:avLst/>
-          </a:prstGeom>
-          <a:noFill/>
-        </p:spPr>
-        <p:txBody>
-          <a:bodyPr wrap="square" anchor="t" lIns="0" rIns="0" tIns="0" bIns="0">
-            <a:spAutoFit/>
-          </a:bodyPr>
-          <a:lstStyle/>
-          <a:p>
-            <a:r>
-              <a:rPr sz="6600" b="0" i="0">
-                <a:solidFill>
-                  <a:srgbClr val="FF6A2B"/>
-                </a:solidFill>
-                <a:latin typeface="Instrument Serif"/>
-              </a:rPr>
-              <a:t>Your</a:t>
-            </a:r>
-          </a:p>
-        </p:txBody>
-      </p:sp>
-      <p:sp>
-        <p:nvSpPr>
-          <p:cNvPr id="11" name="TextBox 10"/>
-          <p:cNvSpPr txBox="1"/>
-          <p:nvPr/>
-        </p:nvSpPr>
-        <p:spPr>
-          <a:xfrm>
-            <a:off x="7790688" y="4297680"/>
-            <a:ext cx="3291840" cy="548640"/>
-          </a:xfrm>
-          <a:prstGeom prst="rect">
-            <a:avLst/>
-          </a:prstGeom>
-          <a:noFill/>
-        </p:spPr>
-        <p:txBody>
-          <a:bodyPr wrap="square" anchor="t" lIns="0" rIns="0" tIns="0" bIns="0">
-            <a:spAutoFit/>
-          </a:bodyPr>
-          <a:lstStyle/>
-          <a:p>
-            <a:r>
-              <a:rPr sz="1200" b="0" i="0" spc="150">
-                <a:solidFill>
-                  <a:srgbClr val="A8E0EA"/>
-                </a:solidFill>
-                <a:latin typeface="IBM Plex Mono"/>
-              </a:rPr>
-              <a:t>THRESHOLDS</a:t>
+              <a:t>[ REPLACE WITH DASHBOARD SCREENSHOT / RECORDING ]</a:t>
             </a:r>
           </a:p>
         </p:txBody>
@@ -5389,7 +6278,7 @@
             <a:avLst/>
           </a:prstGeom>
           <a:solidFill>
-            <a:srgbClr val="050F1C"/>
+            <a:srgbClr val="091C33"/>
           </a:solidFill>
           <a:ln>
             <a:noFill/>
@@ -5404,197 +6293,22 @@
           </a:p>
         </p:txBody>
       </p:sp>
-      <p:pic>
-        <p:nvPicPr>
-          <p:cNvPr id="3" name="Picture 2" descr="om-mark-dark.png"/>
-          <p:cNvPicPr>
-            <a:picLocks noChangeAspect="1"/>
-          </p:cNvPicPr>
-          <p:nvPr/>
-        </p:nvPicPr>
-        <p:blipFill>
-          <a:blip r:embed="rId2"/>
-          <a:stretch>
-            <a:fillRect/>
-          </a:stretch>
-        </p:blipFill>
-        <p:spPr>
-          <a:xfrm>
-            <a:off x="795528" y="612648"/>
-            <a:ext cx="420624" cy="420624"/>
-          </a:xfrm>
-          <a:prstGeom prst="rect">
-            <a:avLst/>
-          </a:prstGeom>
-        </p:spPr>
-      </p:pic>
-      <p:sp>
-        <p:nvSpPr>
-          <p:cNvPr id="4" name="TextBox 3"/>
-          <p:cNvSpPr txBox="1"/>
-          <p:nvPr/>
-        </p:nvSpPr>
-        <p:spPr>
-          <a:xfrm>
-            <a:off x="1261872" y="640080"/>
-            <a:ext cx="5486400" cy="457200"/>
-          </a:xfrm>
-          <a:prstGeom prst="rect">
-            <a:avLst/>
-          </a:prstGeom>
-          <a:noFill/>
-        </p:spPr>
-        <p:txBody>
-          <a:bodyPr wrap="square" anchor="t" lIns="0" rIns="0" tIns="0" bIns="0">
-            <a:spAutoFit/>
-          </a:bodyPr>
-          <a:lstStyle/>
-          <a:p>
-            <a:r>
-              <a:rPr sz="2200" b="0" i="0">
-                <a:solidFill>
-                  <a:srgbClr val="F4EFE3"/>
-                </a:solidFill>
-                <a:latin typeface="Instrument Serif"/>
-              </a:rPr>
-              <a:t>O</a:t>
-            </a:r>
-            <a:r>
-              <a:rPr sz="2200" b="0" i="0">
-                <a:solidFill>
-                  <a:srgbClr val="EDEEE4"/>
-                </a:solidFill>
-                <a:latin typeface="Instrument Serif"/>
-              </a:rPr>
-              <a:t>c</a:t>
-            </a:r>
-            <a:r>
-              <a:rPr sz="2200" b="0" i="0">
-                <a:solidFill>
-                  <a:srgbClr val="E6ECE4"/>
-                </a:solidFill>
-                <a:latin typeface="Instrument Serif"/>
-              </a:rPr>
-              <a:t>e</a:t>
-            </a:r>
-            <a:r>
-              <a:rPr sz="2200" b="0" i="0">
-                <a:solidFill>
-                  <a:srgbClr val="DFEBE5"/>
-                </a:solidFill>
-                <a:latin typeface="Instrument Serif"/>
-              </a:rPr>
-              <a:t>a</a:t>
-            </a:r>
-            <a:r>
-              <a:rPr sz="2200" b="0" i="0">
-                <a:solidFill>
-                  <a:srgbClr val="D8EAE6"/>
-                </a:solidFill>
-                <a:latin typeface="Instrument Serif"/>
-              </a:rPr>
-              <a:t>n</a:t>
-            </a:r>
-            <a:r>
-              <a:rPr sz="2200" b="0" i="0">
-                <a:solidFill>
-                  <a:srgbClr val="D1E8E6"/>
-                </a:solidFill>
-                <a:latin typeface="Instrument Serif"/>
-              </a:rPr>
-              <a:t> </a:t>
-            </a:r>
-            <a:r>
-              <a:rPr sz="2200" b="0" i="0">
-                <a:solidFill>
-                  <a:srgbClr val="CBE7E7"/>
-                </a:solidFill>
-                <a:latin typeface="Instrument Serif"/>
-              </a:rPr>
-              <a:t>M</a:t>
-            </a:r>
-            <a:r>
-              <a:rPr sz="2200" b="0" i="0">
-                <a:solidFill>
-                  <a:srgbClr val="C4E5E7"/>
-                </a:solidFill>
-                <a:latin typeface="Instrument Serif"/>
-              </a:rPr>
-              <a:t>o</a:t>
-            </a:r>
-            <a:r>
-              <a:rPr sz="2200" b="0" i="0">
-                <a:solidFill>
-                  <a:srgbClr val="BDE4E8"/>
-                </a:solidFill>
-                <a:latin typeface="Instrument Serif"/>
-              </a:rPr>
-              <a:t>t</a:t>
-            </a:r>
-            <a:r>
-              <a:rPr sz="2200" b="0" i="0">
-                <a:solidFill>
-                  <a:srgbClr val="B6E3E9"/>
-                </a:solidFill>
-                <a:latin typeface="Instrument Serif"/>
-              </a:rPr>
-              <a:t>i</a:t>
-            </a:r>
-            <a:r>
-              <a:rPr sz="2200" b="0" i="0">
-                <a:solidFill>
-                  <a:srgbClr val="AFE1E9"/>
-                </a:solidFill>
-                <a:latin typeface="Instrument Serif"/>
-              </a:rPr>
-              <a:t>o</a:t>
-            </a:r>
-            <a:r>
-              <a:rPr sz="2200" b="0" i="0">
-                <a:solidFill>
-                  <a:srgbClr val="A8E0EA"/>
-                </a:solidFill>
-                <a:latin typeface="Instrument Serif"/>
-              </a:rPr>
-              <a:t>n</a:t>
-            </a:r>
-            <a:r>
-              <a:rPr sz="2200" b="0" i="0">
-                <a:solidFill>
-                  <a:srgbClr val="A8E0EA"/>
-                </a:solidFill>
-                <a:latin typeface="Instrument Serif"/>
-              </a:rPr>
-              <a:t> </a:t>
-            </a:r>
-            <a:r>
-              <a:rPr sz="1000" b="0" i="0" spc="220">
-                <a:solidFill>
-                  <a:srgbClr val="A8E0EA"/>
-                </a:solidFill>
-                <a:latin typeface="IBM Plex Mono"/>
-              </a:rPr>
-              <a:t>ANALYTICS</a:t>
-            </a:r>
-          </a:p>
-        </p:txBody>
-      </p:sp>
-      <p:sp>
-        <p:nvSpPr>
-          <p:cNvPr id="5" name="Rectangle 4"/>
+      <p:sp>
+        <p:nvSpPr>
+          <p:cNvPr id="3" name="Rectangle 2"/>
           <p:cNvSpPr/>
           <p:nvPr/>
         </p:nvSpPr>
         <p:spPr>
           <a:xfrm>
-            <a:off x="841248" y="2286000"/>
-            <a:ext cx="1463040" cy="25400"/>
+            <a:off x="841248" y="957580"/>
+            <a:ext cx="384048" cy="15240"/>
           </a:xfrm>
           <a:prstGeom prst="rect">
             <a:avLst/>
           </a:prstGeom>
           <a:solidFill>
-            <a:srgbClr val="FF6A2B"/>
+            <a:srgbClr val="4FC3D7"/>
           </a:solidFill>
           <a:ln>
             <a:noFill/>
@@ -5611,14 +6325,82 @@
       </p:sp>
       <p:sp>
         <p:nvSpPr>
+          <p:cNvPr id="4" name="TextBox 3"/>
+          <p:cNvSpPr txBox="1"/>
+          <p:nvPr/>
+        </p:nvSpPr>
+        <p:spPr>
+          <a:xfrm>
+            <a:off x="1371600" y="868680"/>
+            <a:ext cx="5486400" cy="365760"/>
+          </a:xfrm>
+          <a:prstGeom prst="rect">
+            <a:avLst/>
+          </a:prstGeom>
+          <a:noFill/>
+        </p:spPr>
+        <p:txBody>
+          <a:bodyPr wrap="square" anchor="t" lIns="0" rIns="0" tIns="0" bIns="0">
+            <a:spAutoFit/>
+          </a:bodyPr>
+          <a:lstStyle/>
+          <a:p>
+            <a:r>
+              <a:rPr sz="1200" b="0" i="0" spc="180">
+                <a:solidFill>
+                  <a:srgbClr val="4FC3D7"/>
+                </a:solidFill>
+                <a:latin typeface="IBM Plex Mono"/>
+              </a:rPr>
+              <a:t>WHAT YOU'D RECEIVE</a:t>
+            </a:r>
+          </a:p>
+        </p:txBody>
+      </p:sp>
+      <p:sp>
+        <p:nvSpPr>
+          <p:cNvPr id="5" name="TextBox 4"/>
+          <p:cNvSpPr txBox="1"/>
+          <p:nvPr/>
+        </p:nvSpPr>
+        <p:spPr>
+          <a:xfrm>
+            <a:off x="841248" y="1280160"/>
+            <a:ext cx="9144000" cy="914400"/>
+          </a:xfrm>
+          <a:prstGeom prst="rect">
+            <a:avLst/>
+          </a:prstGeom>
+          <a:noFill/>
+        </p:spPr>
+        <p:txBody>
+          <a:bodyPr wrap="square" anchor="t" lIns="0" rIns="0" tIns="0" bIns="0">
+            <a:spAutoFit/>
+          </a:bodyPr>
+          <a:lstStyle/>
+          <a:p>
+            <a:r>
+              <a:rPr sz="4200" b="0" i="0">
+                <a:solidFill>
+                  <a:srgbClr val="F4EFE3"/>
+                </a:solidFill>
+                <a:latin typeface="Instrument Serif"/>
+              </a:rPr>
+              <a:t>Every single day.</a:t>
+            </a:r>
+          </a:p>
+        </p:txBody>
+      </p:sp>
+      <p:sp>
+        <p:nvSpPr>
           <p:cNvPr id="6" name="TextBox 5"/>
           <p:cNvSpPr txBox="1"/>
           <p:nvPr/>
         </p:nvSpPr>
         <p:spPr>
           <a:xfrm>
-            <a:off x="841248" y="2560320"/>
-            <a:ext cx="10058400" cy="1463040"/>
+            <a:off x="841248" y="3017520"/>
+            <a:ext cx="3291840" cy="1188720"/>
           </a:xfrm>
           <a:prstGeom prst="rect">
             <a:avLst/>
@@ -5631,38 +6413,14 @@
           </a:bodyPr>
           <a:lstStyle/>
           <a:p>
-            <a:pPr>
-              <a:lnSpc>
-                <a:spcPct val="103000"/>
-              </a:lnSpc>
-            </a:pPr>
-            <a:r>
-              <a:rPr sz="5600" b="0" i="0">
-                <a:solidFill>
-                  <a:srgbClr val="F4EFE3"/>
+            <a:r>
+              <a:rPr sz="6600" b="0" i="0">
+                <a:solidFill>
+                  <a:srgbClr val="FF6A2B"/>
                 </a:solidFill>
                 <a:latin typeface="Instrument Serif"/>
               </a:rPr>
-              <a:t>Tell us what you're
-</a:t>
-            </a:r>
-            <a:r>
-              <a:rPr sz="5600" b="0" i="1">
-                <a:solidFill>
-                  <a:srgbClr val="FF6A2B"/>
-                </a:solidFill>
-                <a:latin typeface="Instrument Serif"/>
-              </a:rPr>
-              <a:t>working on</a:t>
-            </a:r>
-            <a:r>
-              <a:rPr sz="5600" b="0" i="0">
-                <a:solidFill>
-                  <a:srgbClr val="F4EFE3"/>
-                </a:solidFill>
-                <a:latin typeface="Instrument Serif"/>
-              </a:rPr>
-              <a:t>.</a:t>
+              <a:t>Daily</a:t>
             </a:r>
           </a:p>
         </p:txBody>
@@ -5675,8 +6433,8 @@
         </p:nvSpPr>
         <p:spPr>
           <a:xfrm>
-            <a:off x="841248" y="4937760"/>
-            <a:ext cx="9144000" cy="1097280"/>
+            <a:off x="841248" y="4297680"/>
+            <a:ext cx="3291840" cy="548640"/>
           </a:xfrm>
           <a:prstGeom prst="rect">
             <a:avLst/>
@@ -5690,45 +6448,149 @@
           <a:lstStyle/>
           <a:p>
             <a:r>
-              <a:rPr sz="1800" b="1" i="0">
-                <a:solidFill>
-                  <a:srgbClr val="F4EFE3"/>
-                </a:solidFill>
-                <a:latin typeface="IBM Plex Sans"/>
-              </a:rPr>
-              <a:t>Giles Fearon</a:t>
-            </a:r>
-          </a:p>
-          <a:p>
-            <a:pPr>
-              <a:spcBef>
-                <a:spcPts val="400"/>
-              </a:spcBef>
-            </a:pPr>
-            <a:r>
-              <a:rPr sz="1300" b="0" i="0">
+              <a:rPr sz="1200" b="0" i="0" spc="150">
                 <a:solidFill>
                   <a:srgbClr val="A8E0EA"/>
                 </a:solidFill>
                 <a:latin typeface="IBM Plex Mono"/>
               </a:rPr>
-              <a:t>giles@oceanmotionanalytics.com</a:t>
-            </a:r>
-          </a:p>
-          <a:p>
-            <a:pPr>
-              <a:spcBef>
-                <a:spcPts val="200"/>
-              </a:spcBef>
-            </a:pPr>
-            <a:r>
-              <a:rPr sz="1300" b="0" i="0">
-                <a:solidFill>
-                  <a:srgbClr val="8A94A2"/>
+              <a:t>FORECAST CYCLE</a:t>
+            </a:r>
+          </a:p>
+        </p:txBody>
+      </p:sp>
+      <p:sp>
+        <p:nvSpPr>
+          <p:cNvPr id="8" name="TextBox 7"/>
+          <p:cNvSpPr txBox="1"/>
+          <p:nvPr/>
+        </p:nvSpPr>
+        <p:spPr>
+          <a:xfrm>
+            <a:off x="4315968" y="3017520"/>
+            <a:ext cx="3291840" cy="1188720"/>
+          </a:xfrm>
+          <a:prstGeom prst="rect">
+            <a:avLst/>
+          </a:prstGeom>
+          <a:noFill/>
+        </p:spPr>
+        <p:txBody>
+          <a:bodyPr wrap="square" anchor="t" lIns="0" rIns="0" tIns="0" bIns="0">
+            <a:spAutoFit/>
+          </a:bodyPr>
+          <a:lstStyle/>
+          <a:p>
+            <a:r>
+              <a:rPr sz="6600" b="0" i="0">
+                <a:solidFill>
+                  <a:srgbClr val="FF6A2B"/>
+                </a:solidFill>
+                <a:latin typeface="Instrument Serif"/>
+              </a:rPr>
+              <a:t>72 h</a:t>
+            </a:r>
+          </a:p>
+        </p:txBody>
+      </p:sp>
+      <p:sp>
+        <p:nvSpPr>
+          <p:cNvPr id="9" name="TextBox 8"/>
+          <p:cNvSpPr txBox="1"/>
+          <p:nvPr/>
+        </p:nvSpPr>
+        <p:spPr>
+          <a:xfrm>
+            <a:off x="4315968" y="4297680"/>
+            <a:ext cx="3291840" cy="548640"/>
+          </a:xfrm>
+          <a:prstGeom prst="rect">
+            <a:avLst/>
+          </a:prstGeom>
+          <a:noFill/>
+        </p:spPr>
+        <p:txBody>
+          <a:bodyPr wrap="square" anchor="t" lIns="0" rIns="0" tIns="0" bIns="0">
+            <a:spAutoFit/>
+          </a:bodyPr>
+          <a:lstStyle/>
+          <a:p>
+            <a:r>
+              <a:rPr sz="1200" b="0" i="0" spc="150">
+                <a:solidFill>
+                  <a:srgbClr val="A8E0EA"/>
                 </a:solidFill>
                 <a:latin typeface="IBM Plex Mono"/>
               </a:rPr>
-              <a:t>oceanmotionanalytics.com</a:t>
+              <a:t>LEAD TIME</a:t>
+            </a:r>
+          </a:p>
+        </p:txBody>
+      </p:sp>
+      <p:sp>
+        <p:nvSpPr>
+          <p:cNvPr id="10" name="TextBox 9"/>
+          <p:cNvSpPr txBox="1"/>
+          <p:nvPr/>
+        </p:nvSpPr>
+        <p:spPr>
+          <a:xfrm>
+            <a:off x="7790688" y="3017520"/>
+            <a:ext cx="3291840" cy="1188720"/>
+          </a:xfrm>
+          <a:prstGeom prst="rect">
+            <a:avLst/>
+          </a:prstGeom>
+          <a:noFill/>
+        </p:spPr>
+        <p:txBody>
+          <a:bodyPr wrap="square" anchor="t" lIns="0" rIns="0" tIns="0" bIns="0">
+            <a:spAutoFit/>
+          </a:bodyPr>
+          <a:lstStyle/>
+          <a:p>
+            <a:r>
+              <a:rPr sz="6600" b="0" i="0">
+                <a:solidFill>
+                  <a:srgbClr val="FF6A2B"/>
+                </a:solidFill>
+                <a:latin typeface="Instrument Serif"/>
+              </a:rPr>
+              <a:t>Your</a:t>
+            </a:r>
+          </a:p>
+        </p:txBody>
+      </p:sp>
+      <p:sp>
+        <p:nvSpPr>
+          <p:cNvPr id="11" name="TextBox 10"/>
+          <p:cNvSpPr txBox="1"/>
+          <p:nvPr/>
+        </p:nvSpPr>
+        <p:spPr>
+          <a:xfrm>
+            <a:off x="7790688" y="4297680"/>
+            <a:ext cx="3291840" cy="548640"/>
+          </a:xfrm>
+          <a:prstGeom prst="rect">
+            <a:avLst/>
+          </a:prstGeom>
+          <a:noFill/>
+        </p:spPr>
+        <p:txBody>
+          <a:bodyPr wrap="square" anchor="t" lIns="0" rIns="0" tIns="0" bIns="0">
+            <a:spAutoFit/>
+          </a:bodyPr>
+          <a:lstStyle/>
+          <a:p>
+            <a:r>
+              <a:rPr sz="1200" b="0" i="0" spc="150">
+                <a:solidFill>
+                  <a:srgbClr val="A8E0EA"/>
+                </a:solidFill>
+                <a:latin typeface="IBM Plex Mono"/>
+              </a:rPr>
+              <a:t>THRESHOLDS</a:t>
             </a:r>
           </a:p>
         </p:txBody>
@@ -6059,4 +6921,324 @@
   </a:objectDefaults>
   <a:extraClrSchemeLst/>
 </a:theme>
+</file>
+
+<file path=ppt/theme/theme2.xml><?xml version="1.0" encoding="utf-8"?>
+<a:theme xmlns:a="http://schemas.openxmlformats.org/drawingml/2006/main" name="Office Theme">
+  <a:themeElements>
+    <a:clrScheme name="Office">
+      <a:dk1>
+        <a:sysClr val="windowText" lastClr="000000"/>
+      </a:dk1>
+      <a:lt1>
+        <a:sysClr val="window" lastClr="FFFFFF"/>
+      </a:lt1>
+      <a:dk2>
+        <a:srgbClr val="1F497D"/>
+      </a:dk2>
+      <a:lt2>
+        <a:srgbClr val="EEECE1"/>
+      </a:lt2>
+      <a:accent1>
+        <a:srgbClr val="4F81BD"/>
+      </a:accent1>
+      <a:accent2>
+        <a:srgbClr val="C0504D"/>
+      </a:accent2>
+      <a:accent3>
+        <a:srgbClr val="9BBB59"/>
+      </a:accent3>
+      <a:accent4>
+        <a:srgbClr val="8064A2"/>
+      </a:accent4>
+      <a:accent5>
+        <a:srgbClr val="4BACC6"/>
+      </a:accent5>
+      <a:accent6>
+        <a:srgbClr val="F79646"/>
+      </a:accent6>
+      <a:hlink>
+        <a:srgbClr val="0000FF"/>
+      </a:hlink>
+      <a:folHlink>
+        <a:srgbClr val="800080"/>
+      </a:folHlink>
+    </a:clrScheme>
+    <a:fontScheme name="Office">
+      <a:majorFont>
+        <a:latin typeface="Calibri"/>
+        <a:ea typeface=""/>
+        <a:cs typeface=""/>
+        <a:font script="Jpan" typeface="ＭＳ Ｐゴシック"/>
+        <a:font script="Hang" typeface="맑은 고딕"/>
+        <a:font script="Hans" typeface="宋体"/>
+        <a:font script="Hant" typeface="新細明體"/>
+        <a:font script="Arab" typeface="Times New Roman"/>
+        <a:font script="Hebr" typeface="Times New Roman"/>
+        <a:font script="Thai" typeface="Angsana New"/>
+        <a:font script="Ethi" typeface="Nyala"/>
+        <a:font script="Beng" typeface="Vrinda"/>
+        <a:font script="Gujr" typeface="Shruti"/>
+        <a:font script="Khmr" typeface="MoolBoran"/>
+        <a:font script="Knda" typeface="Tunga"/>
+        <a:font script="Guru" typeface="Raavi"/>
+        <a:font script="Cans" typeface="Euphemia"/>
+        <a:font script="Cher" typeface="Plantagenet Cherokee"/>
+        <a:font script="Yiii" typeface="Microsoft Yi Baiti"/>
+        <a:font script="Tibt" typeface="Microsoft Himalaya"/>
+        <a:font script="Thaa" typeface="MV Boli"/>
+        <a:font script="Deva" typeface="Mangal"/>
+        <a:font script="Telu" typeface="Gautami"/>
+        <a:font script="Taml" typeface="Latha"/>
+        <a:font script="Syrc" typeface="Estrangelo Edessa"/>
+        <a:font script="Orya" typeface="Kalinga"/>
+        <a:font script="Mlym" typeface="Kartika"/>
+        <a:font script="Laoo" typeface="DokChampa"/>
+        <a:font script="Sinh" typeface="Iskoola Pota"/>
+        <a:font script="Mong" typeface="Mongolian Baiti"/>
+        <a:font script="Viet" typeface="Times New Roman"/>
+        <a:font script="Uigh" typeface="Microsoft Uighur"/>
+        <a:font script="Geor" typeface="Sylfaen"/>
+      </a:majorFont>
+      <a:minorFont>
+        <a:latin typeface="Calibri"/>
+        <a:ea typeface=""/>
+        <a:cs typeface=""/>
+        <a:font script="Jpan" typeface="ＭＳ Ｐゴシック"/>
+        <a:font script="Hang" typeface="맑은 고딕"/>
+        <a:font script="Hans" typeface="宋体"/>
+        <a:font script="Hant" typeface="新細明體"/>
+        <a:font script="Arab" typeface="Arial"/>
+        <a:font script="Hebr" typeface="Arial"/>
+        <a:font script="Thai" typeface="Cordia New"/>
+        <a:font script="Ethi" typeface="Nyala"/>
+        <a:font script="Beng" typeface="Vrinda"/>
+        <a:font script="Gujr" typeface="Shruti"/>
+        <a:font script="Khmr" typeface="DaunPenh"/>
+        <a:font script="Knda" typeface="Tunga"/>
+        <a:font script="Guru" typeface="Raavi"/>
+        <a:font script="Cans" typeface="Euphemia"/>
+        <a:font script="Cher" typeface="Plantagenet Cherokee"/>
+        <a:font script="Yiii" typeface="Microsoft Yi Baiti"/>
+        <a:font script="Tibt" typeface="Microsoft Himalaya"/>
+        <a:font script="Thaa" typeface="MV Boli"/>
+        <a:font script="Deva" typeface="Mangal"/>
+        <a:font script="Telu" typeface="Gautami"/>
+        <a:font script="Taml" typeface="Latha"/>
+        <a:font script="Syrc" typeface="Estrangelo Edessa"/>
+        <a:font script="Orya" typeface="Kalinga"/>
+        <a:font script="Mlym" typeface="Kartika"/>
+        <a:font script="Laoo" typeface="DokChampa"/>
+        <a:font script="Sinh" typeface="Iskoola Pota"/>
+        <a:font script="Mong" typeface="Mongolian Baiti"/>
+        <a:font script="Viet" typeface="Arial"/>
+        <a:font script="Uigh" typeface="Microsoft Uighur"/>
+        <a:font script="Geor" typeface="Sylfaen"/>
+      </a:minorFont>
+    </a:fontScheme>
+    <a:fmtScheme name="Office">
+      <a:fillStyleLst>
+        <a:solidFill>
+          <a:schemeClr val="phClr"/>
+        </a:solidFill>
+        <a:gradFill rotWithShape="1">
+          <a:gsLst>
+            <a:gs pos="0">
+              <a:schemeClr val="phClr">
+                <a:tint val="50000"/>
+                <a:satMod val="300000"/>
+              </a:schemeClr>
+            </a:gs>
+            <a:gs pos="35000">
+              <a:schemeClr val="phClr">
+                <a:tint val="37000"/>
+                <a:satMod val="300000"/>
+              </a:schemeClr>
+            </a:gs>
+            <a:gs pos="100000">
+              <a:schemeClr val="phClr">
+                <a:tint val="15000"/>
+                <a:satMod val="350000"/>
+              </a:schemeClr>
+            </a:gs>
+          </a:gsLst>
+          <a:lin ang="16200000" scaled="1"/>
+        </a:gradFill>
+        <a:gradFill rotWithShape="1">
+          <a:gsLst>
+            <a:gs pos="0">
+              <a:schemeClr val="phClr">
+                <a:tint val="100000"/>
+                <a:shade val="100000"/>
+                <a:satMod val="130000"/>
+              </a:schemeClr>
+            </a:gs>
+            <a:gs pos="100000">
+              <a:schemeClr val="phClr">
+                <a:tint val="50000"/>
+                <a:shade val="100000"/>
+                <a:satMod val="350000"/>
+              </a:schemeClr>
+            </a:gs>
+          </a:gsLst>
+          <a:lin ang="16200000" scaled="0"/>
+        </a:gradFill>
+      </a:fillStyleLst>
+      <a:lnStyleLst>
+        <a:ln w="9525" cap="flat" cmpd="sng" algn="ctr">
+          <a:solidFill>
+            <a:schemeClr val="phClr">
+              <a:shade val="95000"/>
+              <a:satMod val="105000"/>
+            </a:schemeClr>
+          </a:solidFill>
+          <a:prstDash val="solid"/>
+        </a:ln>
+        <a:ln w="25400" cap="flat" cmpd="sng" algn="ctr">
+          <a:solidFill>
+            <a:schemeClr val="phClr"/>
+          </a:solidFill>
+          <a:prstDash val="solid"/>
+        </a:ln>
+        <a:ln w="38100" cap="flat" cmpd="sng" algn="ctr">
+          <a:solidFill>
+            <a:schemeClr val="phClr"/>
+          </a:solidFill>
+          <a:prstDash val="solid"/>
+        </a:ln>
+      </a:lnStyleLst>
+      <a:effectStyleLst>
+        <a:effectStyle>
+          <a:effectLst>
+            <a:outerShdw blurRad="40000" dist="20000" dir="5400000" rotWithShape="0">
+              <a:srgbClr val="000000">
+                <a:alpha val="38000"/>
+              </a:srgbClr>
+            </a:outerShdw>
+          </a:effectLst>
+        </a:effectStyle>
+        <a:effectStyle>
+          <a:effectLst>
+            <a:outerShdw blurRad="40000" dist="23000" dir="5400000" rotWithShape="0">
+              <a:srgbClr val="000000">
+                <a:alpha val="35000"/>
+              </a:srgbClr>
+            </a:outerShdw>
+          </a:effectLst>
+        </a:effectStyle>
+        <a:effectStyle>
+          <a:effectLst>
+            <a:outerShdw blurRad="40000" dist="23000" dir="5400000" rotWithShape="0">
+              <a:srgbClr val="000000">
+                <a:alpha val="35000"/>
+              </a:srgbClr>
+            </a:outerShdw>
+          </a:effectLst>
+          <a:scene3d>
+            <a:camera prst="orthographicFront">
+              <a:rot lat="0" lon="0" rev="0"/>
+            </a:camera>
+            <a:lightRig rig="threePt" dir="t">
+              <a:rot lat="0" lon="0" rev="1200000"/>
+            </a:lightRig>
+          </a:scene3d>
+          <a:sp3d>
+            <a:bevelT w="63500" h="25400"/>
+          </a:sp3d>
+        </a:effectStyle>
+      </a:effectStyleLst>
+      <a:bgFillStyleLst>
+        <a:solidFill>
+          <a:schemeClr val="phClr"/>
+        </a:solidFill>
+        <a:gradFill rotWithShape="1">
+          <a:gsLst>
+            <a:gs pos="0">
+              <a:schemeClr val="phClr">
+                <a:tint val="40000"/>
+                <a:satMod val="350000"/>
+              </a:schemeClr>
+            </a:gs>
+            <a:gs pos="40000">
+              <a:schemeClr val="phClr">
+                <a:tint val="45000"/>
+                <a:shade val="99000"/>
+                <a:satMod val="350000"/>
+              </a:schemeClr>
+            </a:gs>
+            <a:gs pos="100000">
+              <a:schemeClr val="phClr">
+                <a:shade val="20000"/>
+                <a:satMod val="255000"/>
+              </a:schemeClr>
+            </a:gs>
+          </a:gsLst>
+          <a:path path="circle">
+            <a:fillToRect l="50000" t="-80000" r="50000" b="180000"/>
+          </a:path>
+        </a:gradFill>
+        <a:gradFill rotWithShape="1">
+          <a:gsLst>
+            <a:gs pos="0">
+              <a:schemeClr val="phClr">
+                <a:tint val="80000"/>
+                <a:satMod val="300000"/>
+              </a:schemeClr>
+            </a:gs>
+            <a:gs pos="100000">
+              <a:schemeClr val="phClr">
+                <a:shade val="30000"/>
+                <a:satMod val="200000"/>
+              </a:schemeClr>
+            </a:gs>
+          </a:gsLst>
+          <a:path path="circle">
+            <a:fillToRect l="50000" t="50000" r="50000" b="50000"/>
+          </a:path>
+        </a:gradFill>
+      </a:bgFillStyleLst>
+    </a:fmtScheme>
+  </a:themeElements>
+  <a:objectDefaults>
+    <a:spDef>
+      <a:spPr/>
+      <a:bodyPr/>
+      <a:lstStyle/>
+      <a:style>
+        <a:lnRef idx="1">
+          <a:schemeClr val="accent1"/>
+        </a:lnRef>
+        <a:fillRef idx="3">
+          <a:schemeClr val="accent1"/>
+        </a:fillRef>
+        <a:effectRef idx="2">
+          <a:schemeClr val="accent1"/>
+        </a:effectRef>
+        <a:fontRef idx="minor">
+          <a:schemeClr val="lt1"/>
+        </a:fontRef>
+      </a:style>
+    </a:spDef>
+    <a:lnDef>
+      <a:spPr/>
+      <a:bodyPr/>
+      <a:lstStyle/>
+      <a:style>
+        <a:lnRef idx="2">
+          <a:schemeClr val="accent1"/>
+        </a:lnRef>
+        <a:fillRef idx="0">
+          <a:schemeClr val="accent1"/>
+        </a:fillRef>
+        <a:effectRef idx="1">
+          <a:schemeClr val="accent1"/>
+        </a:effectRef>
+        <a:fontRef idx="minor">
+          <a:schemeClr val="tx1"/>
+        </a:fontRef>
+      </a:style>
+    </a:lnDef>
+  </a:objectDefaults>
+  <a:extraClrSchemeLst/>
+</a:theme>
 </file>
--- a/pitch/oma-pitch-template.pptx
+++ b/pitch/oma-pitch-template.pptx
@@ -3953,7 +3953,7 @@
                 </a:solidFill>
                 <a:latin typeface="IBM Plex Sans"/>
               </a:rPr>
-              <a:t>Prepared for [Client]  ·  August 2026</a:t>
+              <a:t>Prepared for [Client]  ·  September 2026</a:t>
             </a:r>
           </a:p>
         </p:txBody>
@@ -4701,7 +4701,7 @@
                 </a:solidFill>
                 <a:latin typeface="IBM Plex Sans"/>
               </a:rPr>
-              <a:t>Prepared for [Client]  ·  August 2026</a:t>
+              <a:t>Prepared for [Client]  ·  September 2026</a:t>
             </a:r>
           </a:p>
         </p:txBody>
@@ -4739,7 +4739,7 @@
             <a:avLst/>
           </a:prstGeom>
           <a:solidFill>
-            <a:srgbClr val="F4EFE3"/>
+            <a:srgbClr val="FFFFFF"/>
           </a:solidFill>
           <a:ln>
             <a:noFill/>
@@ -5202,7 +5202,7 @@
             <a:avLst/>
           </a:prstGeom>
           <a:solidFill>
-            <a:srgbClr val="F4EFE3"/>
+            <a:srgbClr val="FFFFFF"/>
           </a:solidFill>
           <a:ln>
             <a:noFill/>
@@ -5478,7 +5478,7 @@
             <a:avLst/>
           </a:prstGeom>
           <a:solidFill>
-            <a:srgbClr val="F4EFE3"/>
+            <a:srgbClr val="FFFFFF"/>
           </a:solidFill>
           <a:ln>
             <a:noFill/>
@@ -5606,7 +5606,7 @@
             <a:avLst/>
           </a:prstGeom>
           <a:solidFill>
-            <a:srgbClr val="EFE9D9"/>
+            <a:srgbClr val="F1F3F6"/>
           </a:solidFill>
           <a:ln>
             <a:noFill/>
@@ -5773,7 +5773,7 @@
             <a:avLst/>
           </a:prstGeom>
           <a:solidFill>
-            <a:srgbClr val="EFE9D9"/>
+            <a:srgbClr val="F1F3F6"/>
           </a:solidFill>
           <a:ln>
             <a:noFill/>
@@ -5958,7 +5958,7 @@
             <a:avLst/>
           </a:prstGeom>
           <a:solidFill>
-            <a:srgbClr val="F4EFE3"/>
+            <a:srgbClr val="FFFFFF"/>
           </a:solidFill>
           <a:ln>
             <a:noFill/>
